--- a/slides/datasets-in-10-minutes-raft.pptx
+++ b/slides/datasets-in-10-minutes-raft.pptx
@@ -10290,7 +10290,7 @@
                 <a:ea typeface="Noto Sans CJK JP"/>
                 <a:cs typeface="Noto Sans"/>
               </a:rPr>
-              <a:t>論文Table 2。各課題のmacro-F1を等しく平均した値。</a:t>
+              <a:t>各課題のmacro-F1を等しく平均した値。</a:t>
             </a:r>
           </a:p>
         </p:txBody>

--- a/slides/datasets-in-10-minutes-raft.pptx
+++ b/slides/datasets-in-10-minutes-raft.pptx
@@ -32,14 +32,12 @@
     <p:sldId id="280" r:id="rId30"/>
     <p:sldId id="281" r:id="rId31"/>
     <p:sldId id="282" r:id="rId32"/>
-    <p:sldId id="283" r:id="rId33"/>
     <p:sldId id="285" r:id="rId35"/>
     <p:sldId id="286" r:id="rId36"/>
     <p:sldId id="287" r:id="rId37"/>
     <p:sldId id="288" r:id="rId38"/>
     <p:sldId id="289" r:id="rId39"/>
     <p:sldId id="290" r:id="rId40"/>
-    <p:sldId id="291" r:id="rId41"/>
     <p:sldId id="293" r:id="rId43"/>
     <p:sldId id="295" r:id="rId45"/>
     <p:sldId id="296" r:id="rId46"/>
@@ -13057,28 +13055,20 @@
           </a:bodyPr>
           <a:lstStyle/>
           <a:p>
-            <a:pPr algn="l">
-              <a:lnSpc>
-                <a:spcPct val="110000"/>
-              </a:lnSpc>
-              <a:buNone/>
-              <a:defRPr sz="2800" b="0">
-                <a:solidFill>
-                  <a:srgbClr val="303437"/>
-                </a:solidFill>
-                <a:latin typeface="Noto Sans"/>
-              </a:defRPr>
-            </a:pPr>
-            <a:r>
-              <a:rPr sz="2800" b="1" lang="ja-JP" altLang="en-US">
-                <a:solidFill>
-                  <a:srgbClr val="303437"/>
-                </a:solidFill>
-                <a:latin typeface="Noto Sans"/>
-                <a:ea typeface="Noto Sans CJK JP"/>
-                <a:cs typeface="Noto Sans"/>
-              </a:rPr>
-              <a:t>追加例1：研究の影響声明（1/2）</a:t>
+            <a:pPr>
+              <a:lnSpc>
+                <a:spcPts val="3247"/>
+              </a:lnSpc>
+            </a:pPr>
+            <a:r>
+              <a:rPr sz="2800" b="1">
+                <a:solidFill>
+                  <a:srgbClr val="303437"/>
+                </a:solidFill>
+                <a:latin typeface="Noto Sans"/>
+                <a:ea typeface="Noto Sans CJK JP"/>
+              </a:rPr>
+              <a:t>追加例1：研究の影響声明</a:t>
             </a:r>
           </a:p>
         </p:txBody>
@@ -13133,250 +13123,6 @@
       </p:sp>
       <p:sp>
         <p:nvSpPr>
-          <p:cNvPr id="4" name="TextBox 3"/>
-          <p:cNvSpPr txBox="1"/>
-          <p:nvPr/>
-        </p:nvSpPr>
-        <p:spPr>
-          <a:xfrm>
-            <a:off x="548640" y="1399032"/>
-            <a:ext cx="8046720" cy="201168"/>
-          </a:xfrm>
-          <a:prstGeom prst="rect">
-            <a:avLst/>
-          </a:prstGeom>
-          <a:noFill/>
-        </p:spPr>
-        <p:txBody>
-          <a:bodyPr wrap="square" lIns="0" rIns="0" tIns="0" bIns="0">
-            <a:noAutofit/>
-          </a:bodyPr>
-          <a:lstStyle/>
-          <a:p>
-            <a:pPr algn="l">
-              <a:lnSpc>
-                <a:spcPct val="117000"/>
-              </a:lnSpc>
-              <a:spcBef>
-                <a:spcPts val="0"/>
-              </a:spcBef>
-              <a:spcAft>
-                <a:spcPts val="0"/>
-              </a:spcAft>
-              <a:buNone/>
-              <a:defRPr sz="1200" b="0">
-                <a:solidFill>
-                  <a:srgbClr val="303437"/>
-                </a:solidFill>
-                <a:latin typeface="Noto Sans"/>
-              </a:defRPr>
-            </a:pPr>
-            <a:r>
-              <a:rPr sz="1200" b="0" lang="ja-JP" altLang="en-US">
-                <a:solidFill>
-                  <a:srgbClr val="626669"/>
-                </a:solidFill>
-                <a:latin typeface="Noto Sans"/>
-                <a:ea typeface="Noto Sans CJK JP"/>
-                <a:cs typeface="Noto Sans"/>
-              </a:rPr>
-              <a:t>入力（抜粋）／原文と日本語</a:t>
-            </a:r>
-          </a:p>
-        </p:txBody>
-      </p:sp>
-      <p:sp>
-        <p:nvSpPr>
-          <p:cNvPr id="5" name="quote-frame"/>
-          <p:cNvSpPr/>
-          <p:nvPr/>
-        </p:nvSpPr>
-        <p:spPr>
-          <a:xfrm>
-            <a:off x="548640" y="1655064"/>
-            <a:ext cx="8046720" cy="1372362"/>
-          </a:xfrm>
-          <a:prstGeom prst="rect">
-            <a:avLst/>
-          </a:prstGeom>
-          <a:solidFill>
-            <a:srgbClr val="EBEDEB"/>
-          </a:solidFill>
-          <a:ln>
-            <a:noFill/>
-          </a:ln>
-          <a:effectLst/>
-        </p:spPr>
-        <p:style>
-          <a:lnRef idx="1">
-            <a:schemeClr val="accent1"/>
-          </a:lnRef>
-          <a:fillRef idx="3">
-            <a:schemeClr val="accent1"/>
-          </a:fillRef>
-          <a:effectRef idx="0">
-            <a:schemeClr val="accent1"/>
-          </a:effectRef>
-          <a:fontRef idx="minor">
-            <a:schemeClr val="lt1"/>
-          </a:fontRef>
-        </p:style>
-        <p:txBody>
-          <a:bodyPr rtlCol="0" anchor="ctr" wrap="square" lIns="177800" rIns="177800" tIns="101600" bIns="127000">
-            <a:noAutofit/>
-          </a:bodyPr>
-          <a:lstStyle/>
-          <a:p>
-            <a:pPr algn="l">
-              <a:lnSpc>
-                <a:spcPts val="2201"/>
-              </a:lnSpc>
-              <a:spcBef>
-                <a:spcPts val="0"/>
-              </a:spcBef>
-              <a:spcAft>
-                <a:spcPts val="0"/>
-              </a:spcAft>
-              <a:buNone/>
-              <a:defRPr sz="1850" b="0">
-                <a:solidFill>
-                  <a:srgbClr val="303437"/>
-                </a:solidFill>
-                <a:latin typeface="Noto Sans"/>
-              </a:defRPr>
-            </a:pPr>
-            <a:r>
-              <a:rPr sz="1850" b="0" lang="ja-JP" altLang="en-US">
-                <a:solidFill>
-                  <a:srgbClr val="303437"/>
-                </a:solidFill>
-                <a:latin typeface="Noto Sans"/>
-                <a:ea typeface="Noto Sans CJK JP"/>
-                <a:cs typeface="Noto Sans"/>
-              </a:rPr>
-              <a:t>Paper title: Improving Local Identifiability in Probabilistic Box Embeddings</a:t>
-            </a:r>
-          </a:p>
-          <a:p>
-            <a:pPr algn="l">
-              <a:lnSpc>
-                <a:spcPts val="2201"/>
-              </a:lnSpc>
-              <a:spcBef>
-                <a:spcPts val="0"/>
-              </a:spcBef>
-              <a:spcAft>
-                <a:spcPts val="0"/>
-              </a:spcAft>
-              <a:buNone/>
-              <a:defRPr sz="1850" b="0">
-                <a:solidFill>
-                  <a:srgbClr val="303437"/>
-                </a:solidFill>
-                <a:latin typeface="Noto Sans"/>
-              </a:defRPr>
-            </a:pPr>
-            <a:r>
-              <a:rPr sz="1850" b="0" lang="ja-JP" altLang="en-US">
-                <a:solidFill>
-                  <a:srgbClr val="303437"/>
-                </a:solidFill>
-                <a:latin typeface="Noto Sans"/>
-                <a:ea typeface="Noto Sans CJK JP"/>
-                <a:cs typeface="Noto Sans"/>
-              </a:rPr>
-              <a:t>Impact statement: This work does not present any foreseeable societal consequence.</a:t>
-            </a:r>
-          </a:p>
-        </p:txBody>
-      </p:sp>
-      <p:sp>
-        <p:nvSpPr>
-          <p:cNvPr id="6" name="TextBox 5"/>
-          <p:cNvSpPr txBox="1"/>
-          <p:nvPr/>
-        </p:nvSpPr>
-        <p:spPr>
-          <a:xfrm>
-            <a:off x="594360" y="3082290"/>
-            <a:ext cx="7955279" cy="614045"/>
-          </a:xfrm>
-          <a:prstGeom prst="rect">
-            <a:avLst/>
-          </a:prstGeom>
-          <a:noFill/>
-        </p:spPr>
-        <p:txBody>
-          <a:bodyPr wrap="square" lIns="0" rIns="0" tIns="0" bIns="0" anchor="t">
-            <a:noAutofit/>
-          </a:bodyPr>
-          <a:lstStyle/>
-          <a:p>
-            <a:pPr algn="l">
-              <a:lnSpc>
-                <a:spcPts val="2201"/>
-              </a:lnSpc>
-              <a:spcBef>
-                <a:spcPts val="0"/>
-              </a:spcBef>
-              <a:spcAft>
-                <a:spcPts val="0"/>
-              </a:spcAft>
-              <a:buNone/>
-              <a:defRPr sz="1850" b="0">
-                <a:solidFill>
-                  <a:srgbClr val="303437"/>
-                </a:solidFill>
-                <a:latin typeface="Noto Sans"/>
-              </a:defRPr>
-            </a:pPr>
-            <a:r>
-              <a:rPr sz="1850" b="0" lang="ja-JP" altLang="en-US">
-                <a:solidFill>
-                  <a:srgbClr val="303437"/>
-                </a:solidFill>
-                <a:latin typeface="Noto Sans"/>
-                <a:ea typeface="Noto Sans CJK JP"/>
-                <a:cs typeface="Noto Sans"/>
-              </a:rPr>
-              <a:t>論文名：確率的ボックス埋め込みにおける局所的な識別可能性の改善</a:t>
-            </a:r>
-          </a:p>
-          <a:p>
-            <a:pPr algn="l">
-              <a:lnSpc>
-                <a:spcPts val="2201"/>
-              </a:lnSpc>
-              <a:spcBef>
-                <a:spcPts val="0"/>
-              </a:spcBef>
-              <a:spcAft>
-                <a:spcPts val="0"/>
-              </a:spcAft>
-              <a:buNone/>
-              <a:defRPr sz="1850" b="0">
-                <a:solidFill>
-                  <a:srgbClr val="303437"/>
-                </a:solidFill>
-                <a:latin typeface="Noto Sans"/>
-              </a:defRPr>
-            </a:pPr>
-            <a:r>
-              <a:rPr sz="1850" b="0" lang="ja-JP" altLang="en-US">
-                <a:solidFill>
-                  <a:srgbClr val="303437"/>
-                </a:solidFill>
-                <a:latin typeface="Noto Sans"/>
-                <a:ea typeface="Noto Sans CJK JP"/>
-                <a:cs typeface="Noto Sans"/>
-              </a:rPr>
-              <a:t>影響声明：この研究には、予測可能な社会的影響はない。</a:t>
-            </a:r>
-          </a:p>
-        </p:txBody>
-      </p:sp>
-      <p:sp>
-        <p:nvSpPr>
           <p:cNvPr id="7" name="sources"/>
           <p:cNvSpPr txBox="1"/>
           <p:nvPr/>
@@ -13452,130 +13198,16 @@
           </a:p>
         </p:txBody>
       </p:sp>
-    </p:spTree>
-  </p:cSld>
-  <p:clrMapOvr>
-    <a:masterClrMapping/>
-  </p:clrMapOvr>
-</p:sld>
-</file>
-
-<file path=ppt/slides/slide28.xml><?xml version="1.0" encoding="utf-8"?>
-<p:sld xmlns:a="http://schemas.openxmlformats.org/drawingml/2006/main" xmlns:p="http://schemas.openxmlformats.org/presentationml/2006/main" xmlns:r="http://schemas.openxmlformats.org/officeDocument/2006/relationships">
-  <p:cSld>
-    <p:spTree>
-      <p:nvGrpSpPr>
-        <p:cNvPr id="1" name=""/>
-        <p:cNvGrpSpPr/>
-        <p:nvPr/>
-      </p:nvGrpSpPr>
-      <p:grpSpPr/>
       <p:sp>
         <p:nvSpPr>
-          <p:cNvPr id="2" name="Title 1"/>
-          <p:cNvSpPr>
-            <a:spLocks noGrp="1"/>
-          </p:cNvSpPr>
-          <p:nvPr>
-            <p:ph type="title"/>
-          </p:nvPr>
-        </p:nvSpPr>
-        <p:spPr>
-          <a:xfrm>
-            <a:off x="468172" y="650138"/>
-            <a:ext cx="8206740" cy="616305"/>
-          </a:xfrm>
-        </p:spPr>
-        <p:txBody>
-          <a:bodyPr wrap="square" lIns="0" rIns="0" tIns="0" bIns="0">
-            <a:noAutofit/>
-          </a:bodyPr>
-          <a:lstStyle/>
-          <a:p>
-            <a:pPr algn="l">
-              <a:lnSpc>
-                <a:spcPct val="110000"/>
-              </a:lnSpc>
-              <a:buNone/>
-              <a:defRPr sz="2800" b="0">
-                <a:solidFill>
-                  <a:srgbClr val="303437"/>
-                </a:solidFill>
-                <a:latin typeface="Noto Sans"/>
-              </a:defRPr>
-            </a:pPr>
-            <a:r>
-              <a:rPr sz="2800" b="1" lang="ja-JP" altLang="en-US">
-                <a:solidFill>
-                  <a:srgbClr val="303437"/>
-                </a:solidFill>
-                <a:latin typeface="Noto Sans"/>
-                <a:ea typeface="Noto Sans CJK JP"/>
-                <a:cs typeface="Noto Sans"/>
-              </a:rPr>
-              <a:t>追加例1：研究の影響声明（2/2）</a:t>
-            </a:r>
-          </a:p>
-        </p:txBody>
-      </p:sp>
-      <p:sp>
-        <p:nvSpPr>
-          <p:cNvPr id="3" name="Title 2"/>
-          <p:cNvSpPr>
-            <a:spLocks noGrp="1"/>
-          </p:cNvSpPr>
-          <p:nvPr>
-            <p:ph type="title" idx="2"/>
-          </p:nvPr>
-        </p:nvSpPr>
-        <p:spPr>
-          <a:xfrm>
-            <a:off x="75895" y="0"/>
-            <a:ext cx="8115300" cy="480060"/>
-          </a:xfrm>
-        </p:spPr>
-        <p:txBody>
-          <a:bodyPr wrap="square" lIns="0" rIns="0" tIns="0" bIns="0" anchor="ctr">
-            <a:noAutofit/>
-          </a:bodyPr>
-          <a:lstStyle/>
-          <a:p>
-            <a:pPr algn="l">
-              <a:lnSpc>
-                <a:spcPct val="110000"/>
-              </a:lnSpc>
-              <a:buNone/>
-              <a:defRPr sz="1400" b="0">
-                <a:solidFill>
-                  <a:srgbClr val="303437"/>
-                </a:solidFill>
-                <a:latin typeface="Noto Sans"/>
-              </a:defRPr>
-            </a:pPr>
-            <a:r>
-              <a:rPr sz="1400" b="1" lang="ja-JP" altLang="en-US">
-                <a:solidFill>
-                  <a:srgbClr val="FFFEF8"/>
-                </a:solidFill>
-                <a:latin typeface="Noto Sans"/>
-                <a:ea typeface="Noto Sans CJK JP"/>
-                <a:cs typeface="Noto Sans"/>
-              </a:rPr>
-              <a:t>Appendix: 1. 題材の異なる追加例</a:t>
-            </a:r>
-          </a:p>
-        </p:txBody>
-      </p:sp>
-      <p:sp>
-        <p:nvSpPr>
-          <p:cNvPr id="4" name="TextBox 3"/>
+          <p:cNvPr id="8" name="original-label"/>
           <p:cNvSpPr txBox="1"/>
           <p:nvPr/>
         </p:nvSpPr>
         <p:spPr>
           <a:xfrm>
             <a:off x="548640" y="1399032"/>
-            <a:ext cx="8046720" cy="201168"/>
+            <a:ext cx="4389120" cy="201168"/>
           </a:xfrm>
           <a:prstGeom prst="rect">
             <a:avLst/>
@@ -13588,26 +13220,20 @@
           </a:bodyPr>
           <a:lstStyle/>
           <a:p>
-            <a:pPr algn="l">
-              <a:lnSpc>
-                <a:spcPct val="117000"/>
-              </a:lnSpc>
-              <a:spcBef>
-                <a:spcPts val="0"/>
-              </a:spcBef>
-              <a:spcAft>
-                <a:spcPts val="0"/>
-              </a:spcAft>
-              <a:buNone/>
-              <a:defRPr sz="1200" b="0">
-                <a:solidFill>
-                  <a:srgbClr val="303437"/>
-                </a:solidFill>
-                <a:latin typeface="Noto Sans"/>
-              </a:defRPr>
-            </a:pPr>
-            <a:r>
-              <a:rPr sz="1200" b="0" lang="ja-JP" altLang="en-US">
+            <a:pPr>
+              <a:lnSpc>
+                <a:spcPts val="1464"/>
+              </a:lnSpc>
+              <a:spcBef>
+                <a:spcPts val="0"/>
+              </a:spcBef>
+              <a:spcAft>
+                <a:spcPts val="0"/>
+              </a:spcAft>
+              <a:buNone/>
+            </a:pPr>
+            <a:r>
+              <a:rPr sz="1200" b="0" lang="ja-JP">
                 <a:solidFill>
                   <a:srgbClr val="626669"/>
                 </a:solidFill>
@@ -13615,149 +13241,21 @@
                 <a:ea typeface="Noto Sans CJK JP"/>
                 <a:cs typeface="Noto Sans"/>
               </a:rPr>
-              <a:t>配布ラベル／原文と日本語</a:t>
+              <a:t>原文（抜粋）</a:t>
             </a:r>
           </a:p>
         </p:txBody>
       </p:sp>
       <p:sp>
         <p:nvSpPr>
-          <p:cNvPr id="5" name="quote-frame"/>
-          <p:cNvSpPr/>
-          <p:nvPr/>
-        </p:nvSpPr>
-        <p:spPr>
-          <a:xfrm>
-            <a:off x="548640" y="1655064"/>
-            <a:ext cx="8046720" cy="533590"/>
-          </a:xfrm>
-          <a:prstGeom prst="rect">
-            <a:avLst/>
-          </a:prstGeom>
-          <a:solidFill>
-            <a:srgbClr val="EBEDEB"/>
-          </a:solidFill>
-          <a:ln>
-            <a:noFill/>
-          </a:ln>
-          <a:effectLst/>
-        </p:spPr>
-        <p:style>
-          <a:lnRef idx="1">
-            <a:schemeClr val="accent1"/>
-          </a:lnRef>
-          <a:fillRef idx="3">
-            <a:schemeClr val="accent1"/>
-          </a:fillRef>
-          <a:effectRef idx="0">
-            <a:schemeClr val="accent1"/>
-          </a:effectRef>
-          <a:fontRef idx="minor">
-            <a:schemeClr val="lt1"/>
-          </a:fontRef>
-        </p:style>
-        <p:txBody>
-          <a:bodyPr rtlCol="0" anchor="ctr" wrap="square" lIns="177800" rIns="177800" tIns="101600" bIns="127000">
-            <a:noAutofit/>
-          </a:bodyPr>
-          <a:lstStyle/>
-          <a:p>
-            <a:pPr algn="l">
-              <a:lnSpc>
-                <a:spcPts val="2201"/>
-              </a:lnSpc>
-              <a:spcBef>
-                <a:spcPts val="0"/>
-              </a:spcBef>
-              <a:spcAft>
-                <a:spcPts val="0"/>
-              </a:spcAft>
-              <a:buNone/>
-              <a:defRPr sz="1850" b="0">
-                <a:solidFill>
-                  <a:srgbClr val="303437"/>
-                </a:solidFill>
-                <a:latin typeface="Noto Sans"/>
-              </a:defRPr>
-            </a:pPr>
-            <a:r>
-              <a:rPr sz="1850" b="0" lang="ja-JP" altLang="en-US">
-                <a:solidFill>
-                  <a:srgbClr val="303437"/>
-                </a:solidFill>
-                <a:latin typeface="Noto Sans"/>
-                <a:ea typeface="Noto Sans CJK JP"/>
-                <a:cs typeface="Noto Sans"/>
-              </a:rPr>
-              <a:t>doesn't mention a harmful application</a:t>
-            </a:r>
-          </a:p>
-        </p:txBody>
-      </p:sp>
-      <p:sp>
-        <p:nvSpPr>
-          <p:cNvPr id="6" name="TextBox 5"/>
+          <p:cNvPr id="9" name="translation-label"/>
           <p:cNvSpPr txBox="1"/>
           <p:nvPr/>
         </p:nvSpPr>
         <p:spPr>
           <a:xfrm>
-            <a:off x="594360" y="2243518"/>
-            <a:ext cx="7955279" cy="334454"/>
-          </a:xfrm>
-          <a:prstGeom prst="rect">
-            <a:avLst/>
-          </a:prstGeom>
-          <a:noFill/>
-        </p:spPr>
-        <p:txBody>
-          <a:bodyPr wrap="square" lIns="0" rIns="0" tIns="0" bIns="0" anchor="t">
-            <a:noAutofit/>
-          </a:bodyPr>
-          <a:lstStyle/>
-          <a:p>
-            <a:pPr algn="l">
-              <a:lnSpc>
-                <a:spcPts val="2201"/>
-              </a:lnSpc>
-              <a:spcBef>
-                <a:spcPts val="0"/>
-              </a:spcBef>
-              <a:spcAft>
-                <a:spcPts val="0"/>
-              </a:spcAft>
-              <a:buNone/>
-              <a:defRPr sz="1850" b="0">
-                <a:solidFill>
-                  <a:srgbClr val="303437"/>
-                </a:solidFill>
-                <a:latin typeface="Noto Sans"/>
-              </a:defRPr>
-            </a:pPr>
-            <a:r>
-              <a:rPr sz="1850" b="0" lang="ja-JP" altLang="en-US">
-                <a:solidFill>
-                  <a:srgbClr val="303437"/>
-                </a:solidFill>
-                <a:latin typeface="Noto Sans"/>
-                <a:ea typeface="Noto Sans CJK JP"/>
-                <a:cs typeface="Noto Sans"/>
-              </a:rPr>
-              <a:t>有害な応用への言及なし</a:t>
-            </a:r>
-          </a:p>
-        </p:txBody>
-      </p:sp>
-      <p:sp>
-        <p:nvSpPr>
-          <p:cNvPr id="7" name="sources"/>
-          <p:cNvSpPr txBox="1"/>
-          <p:nvPr/>
-        </p:nvSpPr>
-        <p:spPr>
-          <a:xfrm>
-            <a:off x="502920" y="4700016"/>
-            <a:ext cx="8183879" cy="530352"/>
+            <a:off x="5212079" y="1399032"/>
+            <a:ext cx="3383280" cy="201168"/>
           </a:xfrm>
           <a:prstGeom prst="rect">
             <a:avLst/>
@@ -13770,26 +13268,20 @@
           </a:bodyPr>
           <a:lstStyle/>
           <a:p>
-            <a:pPr algn="l">
-              <a:lnSpc>
-                <a:spcPts val="940"/>
-              </a:lnSpc>
-              <a:spcBef>
-                <a:spcPts val="0"/>
-              </a:spcBef>
-              <a:spcAft>
-                <a:spcPts val="140"/>
-              </a:spcAft>
-              <a:buNone/>
-              <a:defRPr sz="810" b="0">
-                <a:solidFill>
-                  <a:srgbClr val="303437"/>
-                </a:solidFill>
-                <a:latin typeface="Noto Sans"/>
-              </a:defRPr>
-            </a:pPr>
-            <a:r>
-              <a:rPr sz="810" b="0" lang="ja-JP" altLang="en-US">
+            <a:pPr>
+              <a:lnSpc>
+                <a:spcPts val="1464"/>
+              </a:lnSpc>
+              <a:spcBef>
+                <a:spcPts val="0"/>
+              </a:spcBef>
+              <a:spcAft>
+                <a:spcPts val="0"/>
+              </a:spcAft>
+              <a:buNone/>
+            </a:pPr>
+            <a:r>
+              <a:rPr sz="1200" b="0" lang="ja-JP">
                 <a:solidFill>
                   <a:srgbClr val="626669"/>
                 </a:solidFill>
@@ -13797,30 +13289,208 @@
                 <a:ea typeface="Noto Sans CJK JP"/>
                 <a:cs typeface="Noto Sans"/>
               </a:rPr>
-              <a:t>[1] ought/raft、改訂9ee50172。2026-10-18参照。 neurips_impact_statement_risks / train ID 37。</a:t>
-            </a:r>
-            <a:r>
-              <a:rPr sz="810" b="0" lang="ja-JP" altLang="en-US">
-                <a:solidFill>
-                  <a:srgbClr val="626669"/>
-                </a:solidFill>
-                <a:latin typeface="Noto Sans"/>
-                <a:ea typeface="Noto Sans CJK JP"/>
-                <a:cs typeface="Noto Sans"/>
-              </a:rPr>
-              <a:t>  </a:t>
-            </a:r>
-            <a:r>
-              <a:rPr sz="810" b="0" lang="ja-JP" altLang="en-US">
-                <a:solidFill>
-                  <a:srgbClr val="626669"/>
-                </a:solidFill>
-                <a:latin typeface="Noto Sans"/>
-                <a:ea typeface="Noto Sans CJK JP"/>
-                <a:cs typeface="Noto Sans"/>
-                <a:hlinkClick r:id="rId2"/>
-              </a:rPr>
-              <a:t>https://huggingface.co/datasets/ought/raft</a:t>
+              <a:t>日本語訳</a:t>
+            </a:r>
+          </a:p>
+        </p:txBody>
+      </p:sp>
+      <p:sp>
+        <p:nvSpPr>
+          <p:cNvPr id="10" name="original-panel"/>
+          <p:cNvSpPr txBox="1"/>
+          <p:nvPr/>
+        </p:nvSpPr>
+        <p:spPr>
+          <a:xfrm>
+            <a:off x="548640" y="1655064"/>
+            <a:ext cx="4389120" cy="2547112"/>
+          </a:xfrm>
+          <a:prstGeom prst="rect">
+            <a:avLst/>
+          </a:prstGeom>
+          <a:solidFill>
+            <a:srgbClr val="EBEDEB"/>
+          </a:solidFill>
+          <a:ln>
+            <a:noFill/>
+          </a:ln>
+        </p:spPr>
+        <p:txBody>
+          <a:bodyPr wrap="square" lIns="152400" rIns="152400" tIns="101600" bIns="101600">
+            <a:noAutofit/>
+          </a:bodyPr>
+          <a:lstStyle/>
+          <a:p>
+            <a:pPr>
+              <a:lnSpc>
+                <a:spcPts val="2257"/>
+              </a:lnSpc>
+              <a:spcBef>
+                <a:spcPts val="0"/>
+              </a:spcBef>
+              <a:spcAft>
+                <a:spcPts val="0"/>
+              </a:spcAft>
+              <a:buNone/>
+            </a:pPr>
+            <a:r>
+              <a:rPr sz="1850" b="0" lang="ja-JP">
+                <a:solidFill>
+                  <a:srgbClr val="303437"/>
+                </a:solidFill>
+                <a:latin typeface="Noto Sans"/>
+                <a:ea typeface="Noto Sans CJK JP"/>
+                <a:cs typeface="Noto Sans"/>
+              </a:rPr>
+              <a:t>Input (excerpt): Paper title: Improving Local Identifiability in Probabilistic Box Embeddings</a:t>
+            </a:r>
+          </a:p>
+          <a:p>
+            <a:pPr>
+              <a:lnSpc>
+                <a:spcPts val="2257"/>
+              </a:lnSpc>
+              <a:spcBef>
+                <a:spcPts val="0"/>
+              </a:spcBef>
+              <a:spcAft>
+                <a:spcPts val="0"/>
+              </a:spcAft>
+              <a:buNone/>
+            </a:pPr>
+            <a:r>
+              <a:rPr sz="1850" b="0" lang="ja-JP">
+                <a:solidFill>
+                  <a:srgbClr val="303437"/>
+                </a:solidFill>
+                <a:latin typeface="Noto Sans"/>
+                <a:ea typeface="Noto Sans CJK JP"/>
+                <a:cs typeface="Noto Sans"/>
+              </a:rPr>
+              <a:t>Impact statement: This work does not present any foreseeable societal consequence.</a:t>
+            </a:r>
+          </a:p>
+          <a:p>
+            <a:pPr>
+              <a:lnSpc>
+                <a:spcPts val="2257"/>
+              </a:lnSpc>
+              <a:spcBef>
+                <a:spcPts val="0"/>
+              </a:spcBef>
+              <a:spcAft>
+                <a:spcPts val="0"/>
+              </a:spcAft>
+              <a:buNone/>
+            </a:pPr>
+            <a:r>
+              <a:rPr sz="1850" b="0" lang="ja-JP">
+                <a:solidFill>
+                  <a:srgbClr val="303437"/>
+                </a:solidFill>
+                <a:latin typeface="Noto Sans"/>
+                <a:ea typeface="Noto Sans CJK JP"/>
+                <a:cs typeface="Noto Sans"/>
+              </a:rPr>
+              <a:t>Label: doesn't mention a harmful application</a:t>
+            </a:r>
+          </a:p>
+        </p:txBody>
+      </p:sp>
+      <p:sp>
+        <p:nvSpPr>
+          <p:cNvPr id="11" name="translation-body"/>
+          <p:cNvSpPr txBox="1"/>
+          <p:nvPr/>
+        </p:nvSpPr>
+        <p:spPr>
+          <a:xfrm>
+            <a:off x="5212079" y="1664208"/>
+            <a:ext cx="3383280" cy="1974215"/>
+          </a:xfrm>
+          <a:prstGeom prst="rect">
+            <a:avLst/>
+          </a:prstGeom>
+          <a:noFill/>
+        </p:spPr>
+        <p:txBody>
+          <a:bodyPr wrap="square" lIns="0" rIns="0" tIns="0" bIns="0">
+            <a:noAutofit/>
+          </a:bodyPr>
+          <a:lstStyle/>
+          <a:p>
+            <a:pPr>
+              <a:lnSpc>
+                <a:spcPts val="2135"/>
+              </a:lnSpc>
+              <a:spcBef>
+                <a:spcPts val="0"/>
+              </a:spcBef>
+              <a:spcAft>
+                <a:spcPts val="0"/>
+              </a:spcAft>
+              <a:buNone/>
+            </a:pPr>
+            <a:r>
+              <a:rPr sz="1750" b="0" lang="ja-JP">
+                <a:solidFill>
+                  <a:srgbClr val="303437"/>
+                </a:solidFill>
+                <a:latin typeface="Noto Sans"/>
+                <a:ea typeface="Noto Sans CJK JP"/>
+                <a:cs typeface="Noto Sans"/>
+              </a:rPr>
+              <a:t>入力：論文名：確率的ボックス埋め込みにおける局所的な識別可能性の改善</a:t>
+            </a:r>
+          </a:p>
+          <a:p>
+            <a:pPr>
+              <a:lnSpc>
+                <a:spcPts val="2135"/>
+              </a:lnSpc>
+              <a:spcBef>
+                <a:spcPts val="0"/>
+              </a:spcBef>
+              <a:spcAft>
+                <a:spcPts val="0"/>
+              </a:spcAft>
+              <a:buNone/>
+            </a:pPr>
+            <a:r>
+              <a:rPr sz="1750" b="0" lang="ja-JP">
+                <a:solidFill>
+                  <a:srgbClr val="303437"/>
+                </a:solidFill>
+                <a:latin typeface="Noto Sans"/>
+                <a:ea typeface="Noto Sans CJK JP"/>
+                <a:cs typeface="Noto Sans"/>
+              </a:rPr>
+              <a:t>影響声明：この研究には、予測可能な社会的影響はない。</a:t>
+            </a:r>
+          </a:p>
+          <a:p>
+            <a:pPr>
+              <a:lnSpc>
+                <a:spcPts val="2135"/>
+              </a:lnSpc>
+              <a:spcBef>
+                <a:spcPts val="0"/>
+              </a:spcBef>
+              <a:spcAft>
+                <a:spcPts val="0"/>
+              </a:spcAft>
+              <a:buNone/>
+            </a:pPr>
+            <a:r>
+              <a:rPr sz="1750" b="0" lang="ja-JP">
+                <a:solidFill>
+                  <a:srgbClr val="303437"/>
+                </a:solidFill>
+                <a:latin typeface="Noto Sans"/>
+                <a:ea typeface="Noto Sans CJK JP"/>
+                <a:cs typeface="Noto Sans"/>
+              </a:rPr>
+              <a:t>配布ラベル：有害な応用への言及なし</a:t>
             </a:r>
           </a:p>
         </p:txBody>
@@ -13833,7 +13503,7 @@
 </p:sld>
 </file>
 
-<file path=ppt/slides/slide29.xml><?xml version="1.0" encoding="utf-8"?>
+<file path=ppt/slides/slide28.xml><?xml version="1.0" encoding="utf-8"?>
 <p:sld xmlns:a="http://schemas.openxmlformats.org/drawingml/2006/main" xmlns:p="http://schemas.openxmlformats.org/presentationml/2006/main" xmlns:r="http://schemas.openxmlformats.org/officeDocument/2006/relationships">
   <p:cSld>
     <p:spTree>
@@ -14268,6 +13938,250 @@
 </p:sld>
 </file>
 
+<file path=ppt/slides/slide29.xml><?xml version="1.0" encoding="utf-8"?>
+<p:sld xmlns:a="http://schemas.openxmlformats.org/drawingml/2006/main" xmlns:p="http://schemas.openxmlformats.org/presentationml/2006/main" xmlns:r="http://schemas.openxmlformats.org/officeDocument/2006/relationships">
+  <p:cSld>
+    <p:spTree>
+      <p:nvGrpSpPr>
+        <p:cNvPr id="1" name=""/>
+        <p:cNvGrpSpPr/>
+        <p:nvPr/>
+      </p:nvGrpSpPr>
+      <p:grpSpPr/>
+      <p:sp>
+        <p:nvSpPr>
+          <p:cNvPr id="2" name="Title 1"/>
+          <p:cNvSpPr>
+            <a:spLocks noGrp="1"/>
+          </p:cNvSpPr>
+          <p:nvPr>
+            <p:ph type="title"/>
+          </p:nvPr>
+        </p:nvSpPr>
+        <p:spPr>
+          <a:xfrm>
+            <a:off x="468172" y="650138"/>
+            <a:ext cx="8206740" cy="616305"/>
+          </a:xfrm>
+        </p:spPr>
+        <p:txBody>
+          <a:bodyPr wrap="square" lIns="0" rIns="0" tIns="0" bIns="0">
+            <a:noAutofit/>
+          </a:bodyPr>
+          <a:lstStyle/>
+          <a:p>
+            <a:pPr algn="l">
+              <a:lnSpc>
+                <a:spcPct val="110000"/>
+              </a:lnSpc>
+              <a:buNone/>
+              <a:defRPr sz="2800" b="0">
+                <a:solidFill>
+                  <a:srgbClr val="303437"/>
+                </a:solidFill>
+                <a:latin typeface="Noto Sans"/>
+              </a:defRPr>
+            </a:pPr>
+            <a:r>
+              <a:rPr sz="2800" b="1" lang="ja-JP" altLang="en-US">
+                <a:solidFill>
+                  <a:srgbClr val="303437"/>
+                </a:solidFill>
+                <a:latin typeface="Noto Sans"/>
+                <a:ea typeface="Noto Sans CJK JP"/>
+                <a:cs typeface="Noto Sans"/>
+              </a:rPr>
+              <a:t>実例の補足：記事の難易度</a:t>
+            </a:r>
+          </a:p>
+        </p:txBody>
+      </p:sp>
+      <p:sp>
+        <p:nvSpPr>
+          <p:cNvPr id="3" name="Text Placeholder 2"/>
+          <p:cNvSpPr>
+            <a:spLocks noGrp="1"/>
+          </p:cNvSpPr>
+          <p:nvPr>
+            <p:ph type="body" idx="1"/>
+          </p:nvPr>
+        </p:nvSpPr>
+        <p:spPr>
+          <a:xfrm>
+            <a:off x="594360" y="1463040"/>
+            <a:ext cx="7955279" cy="3044952"/>
+          </a:xfrm>
+        </p:spPr>
+        <p:txBody>
+          <a:bodyPr wrap="square" tIns="91440" bIns="91440">
+            <a:noAutofit/>
+          </a:bodyPr>
+          <a:lstStyle/>
+          <a:p>
+            <a:pPr marL="457200" indent="-355600">
+              <a:lnSpc>
+                <a:spcPts val="2499"/>
+              </a:lnSpc>
+              <a:spcAft>
+                <a:spcPts val="0"/>
+              </a:spcAft>
+              <a:buSzPct val="63333"/>
+              <a:buFont typeface="Noto Sans CJK JP"/>
+              <a:buChar char="●"/>
+              <a:defRPr sz="2100" b="0">
+                <a:solidFill>
+                  <a:srgbClr val="303437"/>
+                </a:solidFill>
+                <a:latin typeface="Noto Sans"/>
+              </a:defRPr>
+            </a:pPr>
+            <a:r>
+              <a:rPr sz="2100" b="0" lang="ja-JP" altLang="en-US">
+                <a:solidFill>
+                  <a:srgbClr val="303437"/>
+                </a:solidFill>
+                <a:latin typeface="Noto Sans"/>
+                <a:ea typeface="Noto Sans CJK JP"/>
+                <a:cs typeface="Noto Sans"/>
+              </a:rPr>
+              <a:t>入力は記事全体。ここでは冒頭1段落を抜粋し、記事全体に付いた配布ラベルを示す。</a:t>
+            </a:r>
+          </a:p>
+        </p:txBody>
+      </p:sp>
+      <p:sp>
+        <p:nvSpPr>
+          <p:cNvPr id="4" name="Title 3"/>
+          <p:cNvSpPr>
+            <a:spLocks noGrp="1"/>
+          </p:cNvSpPr>
+          <p:nvPr>
+            <p:ph type="title" idx="2"/>
+          </p:nvPr>
+        </p:nvSpPr>
+        <p:spPr>
+          <a:xfrm>
+            <a:off x="75895" y="0"/>
+            <a:ext cx="8115300" cy="480060"/>
+          </a:xfrm>
+        </p:spPr>
+        <p:txBody>
+          <a:bodyPr wrap="square" lIns="0" rIns="0" tIns="0" bIns="0" anchor="ctr">
+            <a:noAutofit/>
+          </a:bodyPr>
+          <a:lstStyle/>
+          <a:p>
+            <a:pPr algn="l">
+              <a:lnSpc>
+                <a:spcPct val="110000"/>
+              </a:lnSpc>
+              <a:buNone/>
+              <a:defRPr sz="1400" b="0">
+                <a:solidFill>
+                  <a:srgbClr val="303437"/>
+                </a:solidFill>
+                <a:latin typeface="Noto Sans"/>
+              </a:defRPr>
+            </a:pPr>
+            <a:r>
+              <a:rPr sz="1400" b="1" lang="ja-JP" altLang="en-US">
+                <a:solidFill>
+                  <a:srgbClr val="FFFEF8"/>
+                </a:solidFill>
+                <a:latin typeface="Noto Sans"/>
+                <a:ea typeface="Noto Sans CJK JP"/>
+                <a:cs typeface="Noto Sans"/>
+              </a:rPr>
+              <a:t>Appendix: 1. 題材の異なる追加例</a:t>
+            </a:r>
+          </a:p>
+        </p:txBody>
+      </p:sp>
+      <p:sp>
+        <p:nvSpPr>
+          <p:cNvPr id="5" name="sources"/>
+          <p:cNvSpPr txBox="1"/>
+          <p:nvPr/>
+        </p:nvSpPr>
+        <p:spPr>
+          <a:xfrm>
+            <a:off x="502920" y="4700016"/>
+            <a:ext cx="8183879" cy="530352"/>
+          </a:xfrm>
+          <a:prstGeom prst="rect">
+            <a:avLst/>
+          </a:prstGeom>
+          <a:noFill/>
+        </p:spPr>
+        <p:txBody>
+          <a:bodyPr wrap="square" lIns="0" rIns="0" tIns="0" bIns="0">
+            <a:noAutofit/>
+          </a:bodyPr>
+          <a:lstStyle/>
+          <a:p>
+            <a:pPr algn="l">
+              <a:lnSpc>
+                <a:spcPts val="940"/>
+              </a:lnSpc>
+              <a:spcBef>
+                <a:spcPts val="0"/>
+              </a:spcBef>
+              <a:spcAft>
+                <a:spcPts val="140"/>
+              </a:spcAft>
+              <a:buNone/>
+              <a:defRPr sz="810" b="0">
+                <a:solidFill>
+                  <a:srgbClr val="303437"/>
+                </a:solidFill>
+                <a:latin typeface="Noto Sans"/>
+              </a:defRPr>
+            </a:pPr>
+            <a:r>
+              <a:rPr sz="810" b="0" lang="ja-JP" altLang="en-US">
+                <a:solidFill>
+                  <a:srgbClr val="626669"/>
+                </a:solidFill>
+                <a:latin typeface="Noto Sans"/>
+                <a:ea typeface="Noto Sans CJK JP"/>
+                <a:cs typeface="Noto Sans"/>
+              </a:rPr>
+              <a:t>[1] ought/raft、改訂9ee50172。2026-10-18参照。</a:t>
+            </a:r>
+            <a:r>
+              <a:rPr sz="810" b="0" lang="ja-JP" altLang="en-US">
+                <a:solidFill>
+                  <a:srgbClr val="626669"/>
+                </a:solidFill>
+                <a:latin typeface="Noto Sans"/>
+                <a:ea typeface="Noto Sans CJK JP"/>
+                <a:cs typeface="Noto Sans"/>
+              </a:rPr>
+              <a:t>  </a:t>
+            </a:r>
+            <a:r>
+              <a:rPr sz="810" b="0" lang="ja-JP" altLang="en-US">
+                <a:solidFill>
+                  <a:srgbClr val="626669"/>
+                </a:solidFill>
+                <a:latin typeface="Noto Sans"/>
+                <a:ea typeface="Noto Sans CJK JP"/>
+                <a:cs typeface="Noto Sans"/>
+                <a:hlinkClick r:id="rId2"/>
+              </a:rPr>
+              <a:t>https://huggingface.co/datasets/ought/raft</a:t>
+            </a:r>
+          </a:p>
+        </p:txBody>
+      </p:sp>
+    </p:spTree>
+  </p:cSld>
+  <p:clrMapOvr>
+    <a:masterClrMapping/>
+  </p:clrMapOvr>
+</p:sld>
+</file>
+
 <file path=ppt/slides/slide3.xml><?xml version="1.0" encoding="utf-8"?>
 <p:sld xmlns:a="http://schemas.openxmlformats.org/drawingml/2006/main" xmlns:p="http://schemas.openxmlformats.org/presentationml/2006/main" xmlns:r="http://schemas.openxmlformats.org/officeDocument/2006/relationships">
   <p:cSld>
@@ -14526,250 +14440,6 @@
 </file>
 
 <file path=ppt/slides/slide30.xml><?xml version="1.0" encoding="utf-8"?>
-<p:sld xmlns:a="http://schemas.openxmlformats.org/drawingml/2006/main" xmlns:p="http://schemas.openxmlformats.org/presentationml/2006/main" xmlns:r="http://schemas.openxmlformats.org/officeDocument/2006/relationships">
-  <p:cSld>
-    <p:spTree>
-      <p:nvGrpSpPr>
-        <p:cNvPr id="1" name=""/>
-        <p:cNvGrpSpPr/>
-        <p:nvPr/>
-      </p:nvGrpSpPr>
-      <p:grpSpPr/>
-      <p:sp>
-        <p:nvSpPr>
-          <p:cNvPr id="2" name="Title 1"/>
-          <p:cNvSpPr>
-            <a:spLocks noGrp="1"/>
-          </p:cNvSpPr>
-          <p:nvPr>
-            <p:ph type="title"/>
-          </p:nvPr>
-        </p:nvSpPr>
-        <p:spPr>
-          <a:xfrm>
-            <a:off x="468172" y="650138"/>
-            <a:ext cx="8206740" cy="616305"/>
-          </a:xfrm>
-        </p:spPr>
-        <p:txBody>
-          <a:bodyPr wrap="square" lIns="0" rIns="0" tIns="0" bIns="0">
-            <a:noAutofit/>
-          </a:bodyPr>
-          <a:lstStyle/>
-          <a:p>
-            <a:pPr algn="l">
-              <a:lnSpc>
-                <a:spcPct val="110000"/>
-              </a:lnSpc>
-              <a:buNone/>
-              <a:defRPr sz="2800" b="0">
-                <a:solidFill>
-                  <a:srgbClr val="303437"/>
-                </a:solidFill>
-                <a:latin typeface="Noto Sans"/>
-              </a:defRPr>
-            </a:pPr>
-            <a:r>
-              <a:rPr sz="2800" b="1" lang="ja-JP" altLang="en-US">
-                <a:solidFill>
-                  <a:srgbClr val="303437"/>
-                </a:solidFill>
-                <a:latin typeface="Noto Sans"/>
-                <a:ea typeface="Noto Sans CJK JP"/>
-                <a:cs typeface="Noto Sans"/>
-              </a:rPr>
-              <a:t>実例の補足：記事の難易度</a:t>
-            </a:r>
-          </a:p>
-        </p:txBody>
-      </p:sp>
-      <p:sp>
-        <p:nvSpPr>
-          <p:cNvPr id="3" name="Text Placeholder 2"/>
-          <p:cNvSpPr>
-            <a:spLocks noGrp="1"/>
-          </p:cNvSpPr>
-          <p:nvPr>
-            <p:ph type="body" idx="1"/>
-          </p:nvPr>
-        </p:nvSpPr>
-        <p:spPr>
-          <a:xfrm>
-            <a:off x="594360" y="1463040"/>
-            <a:ext cx="7955279" cy="3044952"/>
-          </a:xfrm>
-        </p:spPr>
-        <p:txBody>
-          <a:bodyPr wrap="square" tIns="91440" bIns="91440">
-            <a:noAutofit/>
-          </a:bodyPr>
-          <a:lstStyle/>
-          <a:p>
-            <a:pPr marL="457200" indent="-355600">
-              <a:lnSpc>
-                <a:spcPts val="2499"/>
-              </a:lnSpc>
-              <a:spcAft>
-                <a:spcPts val="0"/>
-              </a:spcAft>
-              <a:buSzPct val="63333"/>
-              <a:buFont typeface="Noto Sans CJK JP"/>
-              <a:buChar char="●"/>
-              <a:defRPr sz="2100" b="0">
-                <a:solidFill>
-                  <a:srgbClr val="303437"/>
-                </a:solidFill>
-                <a:latin typeface="Noto Sans"/>
-              </a:defRPr>
-            </a:pPr>
-            <a:r>
-              <a:rPr sz="2100" b="0" lang="ja-JP" altLang="en-US">
-                <a:solidFill>
-                  <a:srgbClr val="303437"/>
-                </a:solidFill>
-                <a:latin typeface="Noto Sans"/>
-                <a:ea typeface="Noto Sans CJK JP"/>
-                <a:cs typeface="Noto Sans"/>
-              </a:rPr>
-              <a:t>入力は記事全体。ここでは冒頭1段落を抜粋し、記事全体に付いた配布ラベルを示す。</a:t>
-            </a:r>
-          </a:p>
-        </p:txBody>
-      </p:sp>
-      <p:sp>
-        <p:nvSpPr>
-          <p:cNvPr id="4" name="Title 3"/>
-          <p:cNvSpPr>
-            <a:spLocks noGrp="1"/>
-          </p:cNvSpPr>
-          <p:nvPr>
-            <p:ph type="title" idx="2"/>
-          </p:nvPr>
-        </p:nvSpPr>
-        <p:spPr>
-          <a:xfrm>
-            <a:off x="75895" y="0"/>
-            <a:ext cx="8115300" cy="480060"/>
-          </a:xfrm>
-        </p:spPr>
-        <p:txBody>
-          <a:bodyPr wrap="square" lIns="0" rIns="0" tIns="0" bIns="0" anchor="ctr">
-            <a:noAutofit/>
-          </a:bodyPr>
-          <a:lstStyle/>
-          <a:p>
-            <a:pPr algn="l">
-              <a:lnSpc>
-                <a:spcPct val="110000"/>
-              </a:lnSpc>
-              <a:buNone/>
-              <a:defRPr sz="1400" b="0">
-                <a:solidFill>
-                  <a:srgbClr val="303437"/>
-                </a:solidFill>
-                <a:latin typeface="Noto Sans"/>
-              </a:defRPr>
-            </a:pPr>
-            <a:r>
-              <a:rPr sz="1400" b="1" lang="ja-JP" altLang="en-US">
-                <a:solidFill>
-                  <a:srgbClr val="FFFEF8"/>
-                </a:solidFill>
-                <a:latin typeface="Noto Sans"/>
-                <a:ea typeface="Noto Sans CJK JP"/>
-                <a:cs typeface="Noto Sans"/>
-              </a:rPr>
-              <a:t>Appendix: 1. 題材の異なる追加例</a:t>
-            </a:r>
-          </a:p>
-        </p:txBody>
-      </p:sp>
-      <p:sp>
-        <p:nvSpPr>
-          <p:cNvPr id="5" name="sources"/>
-          <p:cNvSpPr txBox="1"/>
-          <p:nvPr/>
-        </p:nvSpPr>
-        <p:spPr>
-          <a:xfrm>
-            <a:off x="502920" y="4700016"/>
-            <a:ext cx="8183879" cy="530352"/>
-          </a:xfrm>
-          <a:prstGeom prst="rect">
-            <a:avLst/>
-          </a:prstGeom>
-          <a:noFill/>
-        </p:spPr>
-        <p:txBody>
-          <a:bodyPr wrap="square" lIns="0" rIns="0" tIns="0" bIns="0">
-            <a:noAutofit/>
-          </a:bodyPr>
-          <a:lstStyle/>
-          <a:p>
-            <a:pPr algn="l">
-              <a:lnSpc>
-                <a:spcPts val="940"/>
-              </a:lnSpc>
-              <a:spcBef>
-                <a:spcPts val="0"/>
-              </a:spcBef>
-              <a:spcAft>
-                <a:spcPts val="140"/>
-              </a:spcAft>
-              <a:buNone/>
-              <a:defRPr sz="810" b="0">
-                <a:solidFill>
-                  <a:srgbClr val="303437"/>
-                </a:solidFill>
-                <a:latin typeface="Noto Sans"/>
-              </a:defRPr>
-            </a:pPr>
-            <a:r>
-              <a:rPr sz="810" b="0" lang="ja-JP" altLang="en-US">
-                <a:solidFill>
-                  <a:srgbClr val="626669"/>
-                </a:solidFill>
-                <a:latin typeface="Noto Sans"/>
-                <a:ea typeface="Noto Sans CJK JP"/>
-                <a:cs typeface="Noto Sans"/>
-              </a:rPr>
-              <a:t>[1] ought/raft、改訂9ee50172。2026-10-18参照。</a:t>
-            </a:r>
-            <a:r>
-              <a:rPr sz="810" b="0" lang="ja-JP" altLang="en-US">
-                <a:solidFill>
-                  <a:srgbClr val="626669"/>
-                </a:solidFill>
-                <a:latin typeface="Noto Sans"/>
-                <a:ea typeface="Noto Sans CJK JP"/>
-                <a:cs typeface="Noto Sans"/>
-              </a:rPr>
-              <a:t>  </a:t>
-            </a:r>
-            <a:r>
-              <a:rPr sz="810" b="0" lang="ja-JP" altLang="en-US">
-                <a:solidFill>
-                  <a:srgbClr val="626669"/>
-                </a:solidFill>
-                <a:latin typeface="Noto Sans"/>
-                <a:ea typeface="Noto Sans CJK JP"/>
-                <a:cs typeface="Noto Sans"/>
-                <a:hlinkClick r:id="rId2"/>
-              </a:rPr>
-              <a:t>https://huggingface.co/datasets/ought/raft</a:t>
-            </a:r>
-          </a:p>
-        </p:txBody>
-      </p:sp>
-    </p:spTree>
-  </p:cSld>
-  <p:clrMapOvr>
-    <a:masterClrMapping/>
-  </p:clrMapOvr>
-</p:sld>
-</file>
-
-<file path=ppt/slides/slide31.xml><?xml version="1.0" encoding="utf-8"?>
 <p:sld xmlns:a="http://schemas.openxmlformats.org/drawingml/2006/main" xmlns:p="http://schemas.openxmlformats.org/presentationml/2006/main" xmlns:r="http://schemas.openxmlformats.org/officeDocument/2006/relationships">
   <p:cSld>
     <p:spTree>
@@ -15204,7 +14874,7 @@
 </p:sld>
 </file>
 
-<file path=ppt/slides/slide32.xml><?xml version="1.0" encoding="utf-8"?>
+<file path=ppt/slides/slide31.xml><?xml version="1.0" encoding="utf-8"?>
 <p:sld xmlns:a="http://schemas.openxmlformats.org/drawingml/2006/main" xmlns:p="http://schemas.openxmlformats.org/presentationml/2006/main" xmlns:r="http://schemas.openxmlformats.org/officeDocument/2006/relationships">
   <p:cSld>
     <p:spTree>
@@ -15701,6 +15371,415 @@
 </p:sld>
 </file>
 
+<file path=ppt/slides/slide32.xml><?xml version="1.0" encoding="utf-8"?>
+<p:sld xmlns:a="http://schemas.openxmlformats.org/drawingml/2006/main" xmlns:p="http://schemas.openxmlformats.org/presentationml/2006/main" xmlns:r="http://schemas.openxmlformats.org/officeDocument/2006/relationships">
+  <p:cSld>
+    <p:spTree>
+      <p:nvGrpSpPr>
+        <p:cNvPr id="1" name=""/>
+        <p:cNvGrpSpPr/>
+        <p:nvPr/>
+      </p:nvGrpSpPr>
+      <p:grpSpPr/>
+      <p:sp>
+        <p:nvSpPr>
+          <p:cNvPr id="2" name="Title 1"/>
+          <p:cNvSpPr>
+            <a:spLocks noGrp="1"/>
+          </p:cNvSpPr>
+          <p:nvPr>
+            <p:ph type="title"/>
+          </p:nvPr>
+        </p:nvSpPr>
+        <p:spPr>
+          <a:xfrm>
+            <a:off x="468172" y="650138"/>
+            <a:ext cx="8206740" cy="616305"/>
+          </a:xfrm>
+        </p:spPr>
+        <p:txBody>
+          <a:bodyPr wrap="square" lIns="0" rIns="0" tIns="0" bIns="0">
+            <a:noAutofit/>
+          </a:bodyPr>
+          <a:lstStyle/>
+          <a:p>
+            <a:pPr>
+              <a:lnSpc>
+                <a:spcPts val="3247"/>
+              </a:lnSpc>
+            </a:pPr>
+            <a:r>
+              <a:rPr sz="2800" b="1">
+                <a:solidFill>
+                  <a:srgbClr val="303437"/>
+                </a:solidFill>
+                <a:latin typeface="Noto Sans"/>
+                <a:ea typeface="Noto Sans CJK JP"/>
+              </a:rPr>
+              <a:t>追加例5：レビューへの採否（原文）</a:t>
+            </a:r>
+          </a:p>
+        </p:txBody>
+      </p:sp>
+      <p:sp>
+        <p:nvSpPr>
+          <p:cNvPr id="3" name="Title 2"/>
+          <p:cNvSpPr>
+            <a:spLocks noGrp="1"/>
+          </p:cNvSpPr>
+          <p:nvPr>
+            <p:ph type="title" idx="2"/>
+          </p:nvPr>
+        </p:nvSpPr>
+        <p:spPr>
+          <a:xfrm>
+            <a:off x="75895" y="0"/>
+            <a:ext cx="8115300" cy="480060"/>
+          </a:xfrm>
+        </p:spPr>
+        <p:txBody>
+          <a:bodyPr wrap="square" lIns="0" rIns="0" tIns="0" bIns="0" anchor="ctr">
+            <a:noAutofit/>
+          </a:bodyPr>
+          <a:lstStyle/>
+          <a:p>
+            <a:pPr algn="l">
+              <a:lnSpc>
+                <a:spcPct val="110000"/>
+              </a:lnSpc>
+              <a:buNone/>
+              <a:defRPr sz="1400" b="0">
+                <a:solidFill>
+                  <a:srgbClr val="303437"/>
+                </a:solidFill>
+                <a:latin typeface="Noto Sans"/>
+              </a:defRPr>
+            </a:pPr>
+            <a:r>
+              <a:rPr sz="1400" b="1" lang="ja-JP" altLang="en-US">
+                <a:solidFill>
+                  <a:srgbClr val="FFFEF8"/>
+                </a:solidFill>
+                <a:latin typeface="Noto Sans"/>
+                <a:ea typeface="Noto Sans CJK JP"/>
+                <a:cs typeface="Noto Sans"/>
+              </a:rPr>
+              <a:t>Appendix: 1. 題材の異なる追加例</a:t>
+            </a:r>
+          </a:p>
+        </p:txBody>
+      </p:sp>
+      <p:sp>
+        <p:nvSpPr>
+          <p:cNvPr id="7" name="sources"/>
+          <p:cNvSpPr txBox="1"/>
+          <p:nvPr/>
+        </p:nvSpPr>
+        <p:spPr>
+          <a:xfrm>
+            <a:off x="502920" y="4700016"/>
+            <a:ext cx="8183879" cy="530352"/>
+          </a:xfrm>
+          <a:prstGeom prst="rect">
+            <a:avLst/>
+          </a:prstGeom>
+          <a:noFill/>
+        </p:spPr>
+        <p:txBody>
+          <a:bodyPr wrap="square" lIns="0" rIns="0" tIns="0" bIns="0">
+            <a:noAutofit/>
+          </a:bodyPr>
+          <a:lstStyle/>
+          <a:p>
+            <a:pPr algn="l">
+              <a:lnSpc>
+                <a:spcPts val="940"/>
+              </a:lnSpc>
+              <a:spcBef>
+                <a:spcPts val="0"/>
+              </a:spcBef>
+              <a:spcAft>
+                <a:spcPts val="140"/>
+              </a:spcAft>
+              <a:buNone/>
+              <a:defRPr sz="810" b="0">
+                <a:solidFill>
+                  <a:srgbClr val="303437"/>
+                </a:solidFill>
+                <a:latin typeface="Noto Sans"/>
+              </a:defRPr>
+            </a:pPr>
+            <a:r>
+              <a:rPr sz="810" b="0" lang="ja-JP" altLang="en-US">
+                <a:solidFill>
+                  <a:srgbClr val="626669"/>
+                </a:solidFill>
+                <a:latin typeface="Noto Sans"/>
+                <a:ea typeface="Noto Sans CJK JP"/>
+                <a:cs typeface="Noto Sans"/>
+              </a:rPr>
+              <a:t>[1] ought/raft、改訂9ee50172。2026-10-18参照。 systematic_review_inclusion / train ID 43。</a:t>
+            </a:r>
+            <a:r>
+              <a:rPr sz="810" b="0" lang="ja-JP" altLang="en-US">
+                <a:solidFill>
+                  <a:srgbClr val="626669"/>
+                </a:solidFill>
+                <a:latin typeface="Noto Sans"/>
+                <a:ea typeface="Noto Sans CJK JP"/>
+                <a:cs typeface="Noto Sans"/>
+              </a:rPr>
+              <a:t>  </a:t>
+            </a:r>
+            <a:r>
+              <a:rPr sz="810" b="0" lang="ja-JP" altLang="en-US">
+                <a:solidFill>
+                  <a:srgbClr val="626669"/>
+                </a:solidFill>
+                <a:latin typeface="Noto Sans"/>
+                <a:ea typeface="Noto Sans CJK JP"/>
+                <a:cs typeface="Noto Sans"/>
+                <a:hlinkClick r:id="rId2"/>
+              </a:rPr>
+              <a:t>https://huggingface.co/datasets/ought/raft</a:t>
+            </a:r>
+          </a:p>
+        </p:txBody>
+      </p:sp>
+      <p:sp>
+        <p:nvSpPr>
+          <p:cNvPr id="8" name="original-label"/>
+          <p:cNvSpPr txBox="1"/>
+          <p:nvPr/>
+        </p:nvSpPr>
+        <p:spPr>
+          <a:xfrm>
+            <a:off x="548640" y="1170432"/>
+            <a:ext cx="4572000" cy="201168"/>
+          </a:xfrm>
+          <a:prstGeom prst="rect">
+            <a:avLst/>
+          </a:prstGeom>
+          <a:noFill/>
+        </p:spPr>
+        <p:txBody>
+          <a:bodyPr wrap="square" lIns="0" rIns="0" tIns="0" bIns="0">
+            <a:noAutofit/>
+          </a:bodyPr>
+          <a:lstStyle/>
+          <a:p>
+            <a:pPr>
+              <a:lnSpc>
+                <a:spcPts val="1464"/>
+              </a:lnSpc>
+              <a:spcBef>
+                <a:spcPts val="0"/>
+              </a:spcBef>
+              <a:spcAft>
+                <a:spcPts val="0"/>
+              </a:spcAft>
+              <a:buNone/>
+            </a:pPr>
+            <a:r>
+              <a:rPr sz="1200" b="0" lang="ja-JP">
+                <a:solidFill>
+                  <a:srgbClr val="626669"/>
+                </a:solidFill>
+                <a:latin typeface="Noto Sans"/>
+                <a:ea typeface="Noto Sans CJK JP"/>
+                <a:cs typeface="Noto Sans"/>
+              </a:rPr>
+              <a:t>原文（Title・Abstract・Label）</a:t>
+            </a:r>
+          </a:p>
+        </p:txBody>
+      </p:sp>
+      <p:sp>
+        <p:nvSpPr>
+          <p:cNvPr id="9" name="original-panel"/>
+          <p:cNvSpPr txBox="1"/>
+          <p:nvPr/>
+        </p:nvSpPr>
+        <p:spPr>
+          <a:xfrm>
+            <a:off x="502920" y="1417320"/>
+            <a:ext cx="8183879" cy="2931160"/>
+          </a:xfrm>
+          <a:prstGeom prst="rect">
+            <a:avLst/>
+          </a:prstGeom>
+          <a:solidFill>
+            <a:srgbClr val="EBEDEB"/>
+          </a:solidFill>
+          <a:ln>
+            <a:noFill/>
+          </a:ln>
+        </p:spPr>
+        <p:txBody>
+          <a:bodyPr wrap="square" lIns="127000" rIns="127000" tIns="63500" bIns="63500">
+            <a:noAutofit/>
+          </a:bodyPr>
+          <a:lstStyle/>
+          <a:p>
+            <a:pPr>
+              <a:lnSpc>
+                <a:spcPts val="1980"/>
+              </a:lnSpc>
+              <a:spcBef>
+                <a:spcPts val="0"/>
+              </a:spcBef>
+              <a:spcAft>
+                <a:spcPts val="0"/>
+              </a:spcAft>
+              <a:buNone/>
+            </a:pPr>
+            <a:r>
+              <a:rPr sz="1800" b="0" lang="ja-JP">
+                <a:solidFill>
+                  <a:srgbClr val="303437"/>
+                </a:solidFill>
+                <a:latin typeface="Noto Sans"/>
+                <a:ea typeface="Noto Sans CJK JP"/>
+                <a:cs typeface="Noto Sans"/>
+              </a:rPr>
+              <a:t>Title: Imagine being a nice guy: A note on hypothetical vs. Incentivized social preferences</a:t>
+            </a:r>
+          </a:p>
+          <a:p>
+            <a:pPr>
+              <a:lnSpc>
+                <a:spcPts val="1980"/>
+              </a:lnSpc>
+              <a:spcBef>
+                <a:spcPts val="0"/>
+              </a:spcBef>
+              <a:spcAft>
+                <a:spcPts val="0"/>
+              </a:spcAft>
+              <a:buNone/>
+            </a:pPr>
+            <a:r>
+              <a:rPr sz="1800" b="0" lang="ja-JP">
+                <a:solidFill>
+                  <a:srgbClr val="303437"/>
+                </a:solidFill>
+                <a:latin typeface="Noto Sans"/>
+                <a:ea typeface="Noto Sans CJK JP"/>
+                <a:cs typeface="Noto Sans"/>
+              </a:rPr>
+              <a:t>We conducted an experimental study on social preferences using dictator games similar to Fehr et al. (2008).</a:t>
+            </a:r>
+          </a:p>
+          <a:p>
+            <a:pPr>
+              <a:lnSpc>
+                <a:spcPts val="1980"/>
+              </a:lnSpc>
+              <a:spcBef>
+                <a:spcPts val="0"/>
+              </a:spcBef>
+              <a:spcAft>
+                <a:spcPts val="0"/>
+              </a:spcAft>
+              <a:buNone/>
+            </a:pPr>
+            <a:r>
+              <a:rPr sz="1800" b="0" lang="ja-JP">
+                <a:solidFill>
+                  <a:srgbClr val="303437"/>
+                </a:solidFill>
+                <a:latin typeface="Noto Sans"/>
+                <a:ea typeface="Noto Sans CJK JP"/>
+                <a:cs typeface="Noto Sans"/>
+              </a:rPr>
+              <a:t>Our results show that social preferences differ between subjects who receive low-stakes monetary rewards for their decisions and subjects who consider hypothetical stakes.</a:t>
+            </a:r>
+          </a:p>
+          <a:p>
+            <a:pPr>
+              <a:lnSpc>
+                <a:spcPts val="1980"/>
+              </a:lnSpc>
+              <a:spcBef>
+                <a:spcPts val="0"/>
+              </a:spcBef>
+              <a:spcAft>
+                <a:spcPts val="0"/>
+              </a:spcAft>
+              <a:buNone/>
+            </a:pPr>
+            <a:r>
+              <a:rPr sz="1800" b="0" lang="ja-JP">
+                <a:solidFill>
+                  <a:srgbClr val="303437"/>
+                </a:solidFill>
+                <a:latin typeface="Noto Sans"/>
+                <a:ea typeface="Noto Sans CJK JP"/>
+                <a:cs typeface="Noto Sans"/>
+              </a:rPr>
+              <a:t>Our findings indicate that, apart from incentives, gender plays an important role for the categorization of different social preferences.</a:t>
+            </a:r>
+          </a:p>
+          <a:p>
+            <a:pPr>
+              <a:lnSpc>
+                <a:spcPts val="1980"/>
+              </a:lnSpc>
+              <a:spcBef>
+                <a:spcPts val="0"/>
+              </a:spcBef>
+              <a:spcAft>
+                <a:spcPts val="0"/>
+              </a:spcAft>
+              <a:buNone/>
+            </a:pPr>
+            <a:r>
+              <a:rPr sz="1800" b="0" lang="ja-JP">
+                <a:solidFill>
+                  <a:srgbClr val="303437"/>
+                </a:solidFill>
+                <a:latin typeface="Noto Sans"/>
+                <a:ea typeface="Noto Sans CJK JP"/>
+                <a:cs typeface="Noto Sans"/>
+              </a:rPr>
+              <a:t>© 2015. The authors license.</a:t>
+            </a:r>
+          </a:p>
+          <a:p>
+            <a:pPr>
+              <a:lnSpc>
+                <a:spcPts val="1980"/>
+              </a:lnSpc>
+              <a:spcBef>
+                <a:spcPts val="0"/>
+              </a:spcBef>
+              <a:spcAft>
+                <a:spcPts val="0"/>
+              </a:spcAft>
+              <a:buNone/>
+            </a:pPr>
+            <a:r>
+              <a:rPr sz="1800" b="0" lang="ja-JP">
+                <a:solidFill>
+                  <a:srgbClr val="303437"/>
+                </a:solidFill>
+                <a:latin typeface="Noto Sans"/>
+                <a:ea typeface="Noto Sans CJK JP"/>
+                <a:cs typeface="Noto Sans"/>
+              </a:rPr>
+              <a:t>Label: not included</a:t>
+            </a:r>
+          </a:p>
+        </p:txBody>
+      </p:sp>
+    </p:spTree>
+  </p:cSld>
+  <p:clrMapOvr>
+    <a:masterClrMapping/>
+  </p:clrMapOvr>
+</p:sld>
+</file>
+
 <file path=ppt/slides/slide33.xml><?xml version="1.0" encoding="utf-8"?>
 <p:sld xmlns:a="http://schemas.openxmlformats.org/drawingml/2006/main" xmlns:p="http://schemas.openxmlformats.org/presentationml/2006/main" xmlns:r="http://schemas.openxmlformats.org/officeDocument/2006/relationships">
   <p:cSld>
@@ -15733,28 +15812,20 @@
           </a:bodyPr>
           <a:lstStyle/>
           <a:p>
-            <a:pPr algn="l">
-              <a:lnSpc>
-                <a:spcPct val="110000"/>
-              </a:lnSpc>
-              <a:buNone/>
-              <a:defRPr sz="2800" b="0">
-                <a:solidFill>
-                  <a:srgbClr val="303437"/>
-                </a:solidFill>
-                <a:latin typeface="Noto Sans"/>
-              </a:defRPr>
-            </a:pPr>
-            <a:r>
-              <a:rPr sz="2800" b="1" lang="ja-JP" altLang="en-US">
-                <a:solidFill>
-                  <a:srgbClr val="303437"/>
-                </a:solidFill>
-                <a:latin typeface="Noto Sans"/>
-                <a:ea typeface="Noto Sans CJK JP"/>
-                <a:cs typeface="Noto Sans"/>
-              </a:rPr>
-              <a:t>追加例5：レビューへの採否（1/3）</a:t>
+            <a:pPr>
+              <a:lnSpc>
+                <a:spcPts val="3247"/>
+              </a:lnSpc>
+            </a:pPr>
+            <a:r>
+              <a:rPr sz="2800" b="1">
+                <a:solidFill>
+                  <a:srgbClr val="303437"/>
+                </a:solidFill>
+                <a:latin typeface="Noto Sans"/>
+                <a:ea typeface="Noto Sans CJK JP"/>
+              </a:rPr>
+              <a:t>追加例5：レビューへの採否（日本語訳）</a:t>
             </a:r>
           </a:p>
         </p:txBody>
@@ -15809,6 +15880,418 @@
       </p:sp>
       <p:sp>
         <p:nvSpPr>
+          <p:cNvPr id="7" name="sources"/>
+          <p:cNvSpPr txBox="1"/>
+          <p:nvPr/>
+        </p:nvSpPr>
+        <p:spPr>
+          <a:xfrm>
+            <a:off x="502920" y="4700016"/>
+            <a:ext cx="8183879" cy="530352"/>
+          </a:xfrm>
+          <a:prstGeom prst="rect">
+            <a:avLst/>
+          </a:prstGeom>
+          <a:noFill/>
+        </p:spPr>
+        <p:txBody>
+          <a:bodyPr wrap="square" lIns="0" rIns="0" tIns="0" bIns="0">
+            <a:noAutofit/>
+          </a:bodyPr>
+          <a:lstStyle/>
+          <a:p>
+            <a:pPr algn="l">
+              <a:lnSpc>
+                <a:spcPts val="940"/>
+              </a:lnSpc>
+              <a:spcBef>
+                <a:spcPts val="0"/>
+              </a:spcBef>
+              <a:spcAft>
+                <a:spcPts val="140"/>
+              </a:spcAft>
+              <a:buNone/>
+              <a:defRPr sz="810" b="0">
+                <a:solidFill>
+                  <a:srgbClr val="303437"/>
+                </a:solidFill>
+                <a:latin typeface="Noto Sans"/>
+              </a:defRPr>
+            </a:pPr>
+            <a:r>
+              <a:rPr sz="810" b="0" lang="ja-JP" altLang="en-US">
+                <a:solidFill>
+                  <a:srgbClr val="626669"/>
+                </a:solidFill>
+                <a:latin typeface="Noto Sans"/>
+                <a:ea typeface="Noto Sans CJK JP"/>
+                <a:cs typeface="Noto Sans"/>
+              </a:rPr>
+              <a:t>[1] ought/raft、改訂9ee50172。2026-10-18参照。 systematic_review_inclusion / train ID 43。</a:t>
+            </a:r>
+            <a:r>
+              <a:rPr sz="810" b="0" lang="ja-JP" altLang="en-US">
+                <a:solidFill>
+                  <a:srgbClr val="626669"/>
+                </a:solidFill>
+                <a:latin typeface="Noto Sans"/>
+                <a:ea typeface="Noto Sans CJK JP"/>
+                <a:cs typeface="Noto Sans"/>
+              </a:rPr>
+              <a:t>  </a:t>
+            </a:r>
+            <a:r>
+              <a:rPr sz="810" b="0" lang="ja-JP" altLang="en-US">
+                <a:solidFill>
+                  <a:srgbClr val="626669"/>
+                </a:solidFill>
+                <a:latin typeface="Noto Sans"/>
+                <a:ea typeface="Noto Sans CJK JP"/>
+                <a:cs typeface="Noto Sans"/>
+                <a:hlinkClick r:id="rId2"/>
+              </a:rPr>
+              <a:t>https://huggingface.co/datasets/ought/raft</a:t>
+            </a:r>
+          </a:p>
+        </p:txBody>
+      </p:sp>
+      <p:sp>
+        <p:nvSpPr>
+          <p:cNvPr id="8" name="translation-label"/>
+          <p:cNvSpPr txBox="1"/>
+          <p:nvPr/>
+        </p:nvSpPr>
+        <p:spPr>
+          <a:xfrm>
+            <a:off x="548640" y="1399032"/>
+            <a:ext cx="4572000" cy="201168"/>
+          </a:xfrm>
+          <a:prstGeom prst="rect">
+            <a:avLst/>
+          </a:prstGeom>
+          <a:noFill/>
+        </p:spPr>
+        <p:txBody>
+          <a:bodyPr wrap="square" lIns="0" rIns="0" tIns="0" bIns="0">
+            <a:noAutofit/>
+          </a:bodyPr>
+          <a:lstStyle/>
+          <a:p>
+            <a:pPr>
+              <a:lnSpc>
+                <a:spcPts val="1464"/>
+              </a:lnSpc>
+              <a:spcBef>
+                <a:spcPts val="0"/>
+              </a:spcBef>
+              <a:spcAft>
+                <a:spcPts val="0"/>
+              </a:spcAft>
+              <a:buNone/>
+            </a:pPr>
+            <a:r>
+              <a:rPr sz="1200" b="0" lang="ja-JP">
+                <a:solidFill>
+                  <a:srgbClr val="626669"/>
+                </a:solidFill>
+                <a:latin typeface="Noto Sans"/>
+                <a:ea typeface="Noto Sans CJK JP"/>
+                <a:cs typeface="Noto Sans"/>
+              </a:rPr>
+              <a:t>日本語訳</a:t>
+            </a:r>
+          </a:p>
+        </p:txBody>
+      </p:sp>
+      <p:sp>
+        <p:nvSpPr>
+          <p:cNvPr id="9" name="translation-body"/>
+          <p:cNvSpPr txBox="1"/>
+          <p:nvPr/>
+        </p:nvSpPr>
+        <p:spPr>
+          <a:xfrm>
+            <a:off x="594360" y="1655064"/>
+            <a:ext cx="7955279" cy="2516505"/>
+          </a:xfrm>
+          <a:prstGeom prst="rect">
+            <a:avLst/>
+          </a:prstGeom>
+          <a:noFill/>
+        </p:spPr>
+        <p:txBody>
+          <a:bodyPr wrap="square" lIns="0" rIns="0" tIns="0" bIns="0">
+            <a:noAutofit/>
+          </a:bodyPr>
+          <a:lstStyle/>
+          <a:p>
+            <a:pPr>
+              <a:lnSpc>
+                <a:spcPts val="2135"/>
+              </a:lnSpc>
+              <a:spcBef>
+                <a:spcPts val="0"/>
+              </a:spcBef>
+              <a:spcAft>
+                <a:spcPts val="0"/>
+              </a:spcAft>
+              <a:buNone/>
+            </a:pPr>
+            <a:r>
+              <a:rPr sz="1750" b="0" lang="ja-JP">
+                <a:solidFill>
+                  <a:srgbClr val="303437"/>
+                </a:solidFill>
+                <a:latin typeface="Noto Sans"/>
+                <a:ea typeface="Noto Sans CJK JP"/>
+                <a:cs typeface="Noto Sans"/>
+              </a:rPr>
+              <a:t>題名：いい人になったつもりで――仮想的な社会的選好と、報酬を伴う社会的選好について</a:t>
+            </a:r>
+          </a:p>
+          <a:p>
+            <a:pPr>
+              <a:lnSpc>
+                <a:spcPts val="2135"/>
+              </a:lnSpc>
+              <a:spcBef>
+                <a:spcPts val="0"/>
+              </a:spcBef>
+              <a:spcAft>
+                <a:spcPts val="0"/>
+              </a:spcAft>
+              <a:buNone/>
+            </a:pPr>
+            <a:r>
+              <a:rPr sz="1750" b="0" lang="ja-JP">
+                <a:solidFill>
+                  <a:srgbClr val="303437"/>
+                </a:solidFill>
+                <a:latin typeface="Noto Sans"/>
+                <a:ea typeface="Noto Sans CJK JP"/>
+                <a:cs typeface="Noto Sans"/>
+              </a:rPr>
+              <a:t>Fehrら（2008）と同様の独裁者ゲームを用い、社会的選好に関する実験を行った。</a:t>
+            </a:r>
+          </a:p>
+          <a:p>
+            <a:pPr>
+              <a:lnSpc>
+                <a:spcPts val="2135"/>
+              </a:lnSpc>
+              <a:spcBef>
+                <a:spcPts val="0"/>
+              </a:spcBef>
+              <a:spcAft>
+                <a:spcPts val="0"/>
+              </a:spcAft>
+              <a:buNone/>
+            </a:pPr>
+            <a:r>
+              <a:rPr sz="1750" b="0" lang="ja-JP">
+                <a:solidFill>
+                  <a:srgbClr val="303437"/>
+                </a:solidFill>
+                <a:latin typeface="Noto Sans"/>
+                <a:ea typeface="Noto Sans CJK JP"/>
+                <a:cs typeface="Noto Sans"/>
+              </a:rPr>
+              <a:t>意思決定に対して少額の金銭報酬を受け取る参加者と、仮想的な報酬を考える参加者では、社会的選好が異なった。</a:t>
+            </a:r>
+          </a:p>
+          <a:p>
+            <a:pPr>
+              <a:lnSpc>
+                <a:spcPts val="2135"/>
+              </a:lnSpc>
+              <a:spcBef>
+                <a:spcPts val="0"/>
+              </a:spcBef>
+              <a:spcAft>
+                <a:spcPts val="0"/>
+              </a:spcAft>
+              <a:buNone/>
+            </a:pPr>
+            <a:r>
+              <a:rPr sz="1750" b="0" lang="ja-JP">
+                <a:solidFill>
+                  <a:srgbClr val="303437"/>
+                </a:solidFill>
+                <a:latin typeface="Noto Sans"/>
+                <a:ea typeface="Noto Sans CJK JP"/>
+                <a:cs typeface="Noto Sans"/>
+              </a:rPr>
+              <a:t>報酬に加え、性別も社会的選好の分類に重要な役割を持つことが示された。</a:t>
+            </a:r>
+          </a:p>
+          <a:p>
+            <a:pPr>
+              <a:lnSpc>
+                <a:spcPts val="2135"/>
+              </a:lnSpc>
+              <a:spcBef>
+                <a:spcPts val="0"/>
+              </a:spcBef>
+              <a:spcAft>
+                <a:spcPts val="0"/>
+              </a:spcAft>
+              <a:buNone/>
+            </a:pPr>
+            <a:r>
+              <a:rPr sz="1750" b="0" lang="ja-JP">
+                <a:solidFill>
+                  <a:srgbClr val="303437"/>
+                </a:solidFill>
+                <a:latin typeface="Noto Sans"/>
+                <a:ea typeface="Noto Sans CJK JP"/>
+                <a:cs typeface="Noto Sans"/>
+              </a:rPr>
+              <a:t>© 2015。著者によるライセンス表記。</a:t>
+            </a:r>
+          </a:p>
+          <a:p>
+            <a:pPr>
+              <a:lnSpc>
+                <a:spcPts val="2135"/>
+              </a:lnSpc>
+              <a:spcBef>
+                <a:spcPts val="0"/>
+              </a:spcBef>
+              <a:spcAft>
+                <a:spcPts val="0"/>
+              </a:spcAft>
+              <a:buNone/>
+            </a:pPr>
+            <a:r>
+              <a:rPr sz="1750" b="0" lang="ja-JP">
+                <a:solidFill>
+                  <a:srgbClr val="303437"/>
+                </a:solidFill>
+                <a:latin typeface="Noto Sans"/>
+                <a:ea typeface="Noto Sans CJK JP"/>
+                <a:cs typeface="Noto Sans"/>
+              </a:rPr>
+              <a:t>配布ラベル：レビューに含めない</a:t>
+            </a:r>
+          </a:p>
+        </p:txBody>
+      </p:sp>
+    </p:spTree>
+  </p:cSld>
+  <p:clrMapOvr>
+    <a:masterClrMapping/>
+  </p:clrMapOvr>
+</p:sld>
+</file>
+
+<file path=ppt/slides/slide34.xml><?xml version="1.0" encoding="utf-8"?>
+<p:sld xmlns:a="http://schemas.openxmlformats.org/drawingml/2006/main" xmlns:p="http://schemas.openxmlformats.org/presentationml/2006/main" xmlns:r="http://schemas.openxmlformats.org/officeDocument/2006/relationships">
+  <p:cSld>
+    <p:spTree>
+      <p:nvGrpSpPr>
+        <p:cNvPr id="1" name=""/>
+        <p:cNvGrpSpPr/>
+        <p:nvPr/>
+      </p:nvGrpSpPr>
+      <p:grpSpPr/>
+      <p:sp>
+        <p:nvSpPr>
+          <p:cNvPr id="2" name="Title 1"/>
+          <p:cNvSpPr>
+            <a:spLocks noGrp="1"/>
+          </p:cNvSpPr>
+          <p:nvPr>
+            <p:ph type="title"/>
+          </p:nvPr>
+        </p:nvSpPr>
+        <p:spPr>
+          <a:xfrm>
+            <a:off x="468172" y="650138"/>
+            <a:ext cx="8206740" cy="616305"/>
+          </a:xfrm>
+        </p:spPr>
+        <p:txBody>
+          <a:bodyPr wrap="square" lIns="0" rIns="0" tIns="0" bIns="0">
+            <a:noAutofit/>
+          </a:bodyPr>
+          <a:lstStyle/>
+          <a:p>
+            <a:pPr algn="l">
+              <a:lnSpc>
+                <a:spcPct val="110000"/>
+              </a:lnSpc>
+              <a:buNone/>
+              <a:defRPr sz="2800" b="0">
+                <a:solidFill>
+                  <a:srgbClr val="303437"/>
+                </a:solidFill>
+                <a:latin typeface="Noto Sans"/>
+              </a:defRPr>
+            </a:pPr>
+            <a:r>
+              <a:rPr sz="2800" b="1" lang="ja-JP" altLang="en-US">
+                <a:solidFill>
+                  <a:srgbClr val="303437"/>
+                </a:solidFill>
+                <a:latin typeface="Noto Sans"/>
+                <a:ea typeface="Noto Sans CJK JP"/>
+                <a:cs typeface="Noto Sans"/>
+              </a:rPr>
+              <a:t>追加例6：変革的AIの安全性</a:t>
+            </a:r>
+          </a:p>
+        </p:txBody>
+      </p:sp>
+      <p:sp>
+        <p:nvSpPr>
+          <p:cNvPr id="3" name="Title 2"/>
+          <p:cNvSpPr>
+            <a:spLocks noGrp="1"/>
+          </p:cNvSpPr>
+          <p:nvPr>
+            <p:ph type="title" idx="2"/>
+          </p:nvPr>
+        </p:nvSpPr>
+        <p:spPr>
+          <a:xfrm>
+            <a:off x="75895" y="0"/>
+            <a:ext cx="8115300" cy="480060"/>
+          </a:xfrm>
+        </p:spPr>
+        <p:txBody>
+          <a:bodyPr wrap="square" lIns="0" rIns="0" tIns="0" bIns="0" anchor="ctr">
+            <a:noAutofit/>
+          </a:bodyPr>
+          <a:lstStyle/>
+          <a:p>
+            <a:pPr algn="l">
+              <a:lnSpc>
+                <a:spcPct val="110000"/>
+              </a:lnSpc>
+              <a:buNone/>
+              <a:defRPr sz="1400" b="0">
+                <a:solidFill>
+                  <a:srgbClr val="303437"/>
+                </a:solidFill>
+                <a:latin typeface="Noto Sans"/>
+              </a:defRPr>
+            </a:pPr>
+            <a:r>
+              <a:rPr sz="1400" b="1" lang="ja-JP" altLang="en-US">
+                <a:solidFill>
+                  <a:srgbClr val="FFFEF8"/>
+                </a:solidFill>
+                <a:latin typeface="Noto Sans"/>
+                <a:ea typeface="Noto Sans CJK JP"/>
+                <a:cs typeface="Noto Sans"/>
+              </a:rPr>
+              <a:t>Appendix: 1. 題材の異なる追加例</a:t>
+            </a:r>
+          </a:p>
+        </p:txBody>
+      </p:sp>
+      <p:sp>
+        <p:nvSpPr>
           <p:cNvPr id="4" name="TextBox 3"/>
           <p:cNvSpPr txBox="1"/>
           <p:nvPr/>
@@ -15856,7 +16339,7 @@
                 <a:ea typeface="Noto Sans CJK JP"/>
                 <a:cs typeface="Noto Sans"/>
               </a:rPr>
-              <a:t>掲載フィールド：Title・Abstract・Label／左：原文　右：日本語</a:t>
+              <a:t>関連する入力・回答／左：原文　右：日本語</a:t>
             </a:r>
           </a:p>
         </p:txBody>
@@ -15930,7 +16413,7 @@
                 <a:ea typeface="Noto Sans CJK JP"/>
                 <a:cs typeface="Noto Sans"/>
               </a:rPr>
-              <a:t>Imagine being a nice guy: A note on hypothetical vs. Incentivized social preferences</a:t>
+              <a:t>Title: Economics of the singularity</a:t>
             </a:r>
           </a:p>
           <a:p>
@@ -15961,7 +16444,100 @@
                 <a:ea typeface="Noto Sans CJK JP"/>
                 <a:cs typeface="Noto Sans"/>
               </a:rPr>
-              <a:t>We conducted an experimental study on social preferences using dictator games similar to Fehr et al. (2008).</a:t>
+              <a:t>Author: Hanson, Robin</a:t>
+            </a:r>
+          </a:p>
+          <a:p>
+            <a:pPr algn="l">
+              <a:lnSpc>
+                <a:spcPts val="2201"/>
+              </a:lnSpc>
+              <a:spcBef>
+                <a:spcPts val="0"/>
+              </a:spcBef>
+              <a:spcAft>
+                <a:spcPts val="0"/>
+              </a:spcAft>
+              <a:buNone/>
+              <a:defRPr sz="1850" b="0">
+                <a:solidFill>
+                  <a:srgbClr val="303437"/>
+                </a:solidFill>
+                <a:latin typeface="Noto Sans"/>
+              </a:defRPr>
+            </a:pPr>
+            <a:r>
+              <a:rPr sz="1850" b="0" lang="ja-JP" altLang="en-US">
+                <a:solidFill>
+                  <a:srgbClr val="303437"/>
+                </a:solidFill>
+                <a:latin typeface="Noto Sans"/>
+                <a:ea typeface="Noto Sans CJK JP"/>
+                <a:cs typeface="Noto Sans"/>
+              </a:rPr>
+              <a:t>Publication Year: 2008</a:t>
+            </a:r>
+          </a:p>
+          <a:p>
+            <a:pPr algn="l">
+              <a:lnSpc>
+                <a:spcPts val="2201"/>
+              </a:lnSpc>
+              <a:spcBef>
+                <a:spcPts val="0"/>
+              </a:spcBef>
+              <a:spcAft>
+                <a:spcPts val="0"/>
+              </a:spcAft>
+              <a:buNone/>
+              <a:defRPr sz="1850" b="0">
+                <a:solidFill>
+                  <a:srgbClr val="303437"/>
+                </a:solidFill>
+                <a:latin typeface="Noto Sans"/>
+              </a:defRPr>
+            </a:pPr>
+            <a:r>
+              <a:rPr sz="1850" b="0" lang="ja-JP" altLang="en-US">
+                <a:solidFill>
+                  <a:srgbClr val="303437"/>
+                </a:solidFill>
+                <a:latin typeface="Noto Sans"/>
+                <a:ea typeface="Noto Sans CJK JP"/>
+                <a:cs typeface="Noto Sans"/>
+              </a:rPr>
+              <a:t>Publication Title: IEEE Spectrum</a:t>
+            </a:r>
+          </a:p>
+          <a:p>
+            <a:pPr algn="l">
+              <a:lnSpc>
+                <a:spcPts val="2201"/>
+              </a:lnSpc>
+              <a:spcBef>
+                <a:spcPts val="0"/>
+              </a:spcBef>
+              <a:spcAft>
+                <a:spcPts val="0"/>
+              </a:spcAft>
+              <a:buNone/>
+              <a:defRPr sz="1850" b="0">
+                <a:solidFill>
+                  <a:srgbClr val="303437"/>
+                </a:solidFill>
+                <a:latin typeface="Noto Sans"/>
+              </a:defRPr>
+            </a:pPr>
+            <a:r>
+              <a:rPr sz="1850" b="0" lang="ja-JP" altLang="en-US">
+                <a:solidFill>
+                  <a:srgbClr val="303437"/>
+                </a:solidFill>
+                <a:latin typeface="Noto Sans"/>
+                <a:ea typeface="Noto Sans CJK JP"/>
+                <a:cs typeface="Noto Sans"/>
+              </a:rPr>
+              <a:t>TAI safety research</a:t>
             </a:r>
           </a:p>
         </p:txBody>
@@ -16015,7 +16591,7 @@
                 <a:ea typeface="Noto Sans CJK JP"/>
                 <a:cs typeface="Noto Sans"/>
               </a:rPr>
-              <a:t>題名：いい人になったつもりで――仮想的な社会的選好と、報酬を伴う社会的選好について</a:t>
+              <a:t>入力（抜粋）：題名：シンギュラリティの経済学</a:t>
             </a:r>
           </a:p>
           <a:p>
@@ -16046,7 +16622,101 @@
                 <a:ea typeface="Noto Sans CJK JP"/>
                 <a:cs typeface="Noto Sans"/>
               </a:rPr>
-              <a:t>要旨：Fehrら（2008）と同様の独裁者ゲームを用い、社会的選好に関する実験を行った。</a:t>
+              <a:t>著者：ロビン・ハンソン</a:t>
+            </a:r>
+          </a:p>
+          <a:p>
+            <a:pPr algn="l">
+              <a:lnSpc>
+                <a:spcPts val="2201"/>
+              </a:lnSpc>
+              <a:spcBef>
+                <a:spcPts val="0"/>
+              </a:spcBef>
+              <a:spcAft>
+                <a:spcPts val="0"/>
+              </a:spcAft>
+              <a:buNone/>
+              <a:defRPr sz="1850" b="0">
+                <a:solidFill>
+                  <a:srgbClr val="303437"/>
+                </a:solidFill>
+                <a:latin typeface="Noto Sans"/>
+              </a:defRPr>
+            </a:pPr>
+            <a:r>
+              <a:rPr sz="1850" b="0" lang="ja-JP" altLang="en-US">
+                <a:solidFill>
+                  <a:srgbClr val="303437"/>
+                </a:solidFill>
+                <a:latin typeface="Noto Sans"/>
+                <a:ea typeface="Noto Sans CJK JP"/>
+                <a:cs typeface="Noto Sans"/>
+              </a:rPr>
+              <a:t>発表年：2008年</a:t>
+            </a:r>
+          </a:p>
+          <a:p>
+            <a:pPr algn="l">
+              <a:lnSpc>
+                <a:spcPts val="2201"/>
+              </a:lnSpc>
+              <a:spcBef>
+                <a:spcPts val="0"/>
+              </a:spcBef>
+              <a:spcAft>
+                <a:spcPts val="0"/>
+              </a:spcAft>
+              <a:buNone/>
+              <a:defRPr sz="1850" b="0">
+                <a:solidFill>
+                  <a:srgbClr val="303437"/>
+                </a:solidFill>
+                <a:latin typeface="Noto Sans"/>
+              </a:defRPr>
+            </a:pPr>
+            <a:r>
+              <a:rPr sz="1850" b="0" lang="ja-JP" altLang="en-US">
+                <a:solidFill>
+                  <a:srgbClr val="303437"/>
+                </a:solidFill>
+                <a:latin typeface="Noto Sans"/>
+                <a:ea typeface="Noto Sans CJK JP"/>
+                <a:cs typeface="Noto Sans"/>
+              </a:rPr>
+              <a:t>掲載先：IEEE Spectrum</a:t>
+            </a:r>
+          </a:p>
+          <a:p>
+            <a:pPr algn="l">
+              <a:lnSpc>
+                <a:spcPts val="2201"/>
+              </a:lnSpc>
+              <a:spcBef>
+                <a:spcPts val="0"/>
+              </a:spcBef>
+              <a:spcAft>
+                <a:spcPts val="0"/>
+              </a:spcAft>
+              <a:buNone/>
+              <a:defRPr sz="1850" b="0">
+                <a:solidFill>
+                  <a:srgbClr val="303437"/>
+                </a:solidFill>
+                <a:latin typeface="Noto Sans"/>
+              </a:defRPr>
+            </a:pPr>
+            <a:r>
+              <a:rPr sz="1850" b="0" lang="ja-JP" altLang="en-US">
+                <a:solidFill>
+                  <a:srgbClr val="303437"/>
+                </a:solidFill>
+                <a:latin typeface="Noto Sans"/>
+                <a:ea typeface="Noto Sans CJK JP"/>
+                <a:cs typeface="Noto Sans"/>
+              </a:rPr>
+              <a:t>配布ラベル：
+変革的AIの安全性研究</a:t>
             </a:r>
           </a:p>
         </p:txBody>
@@ -16100,7 +16770,7 @@
                 <a:ea typeface="Noto Sans CJK JP"/>
                 <a:cs typeface="Noto Sans"/>
               </a:rPr>
-              <a:t>[1] ought/raft、改訂9ee50172。2026-10-18参照。 systematic_review_inclusion / train ID 43。</a:t>
+              <a:t>[1] ought/raft、改訂9ee50172。2026-10-18参照。 tai_safety_research / train ID 12。</a:t>
             </a:r>
             <a:r>
               <a:rPr sz="810" b="0" lang="ja-JP" altLang="en-US">
@@ -16136,7 +16806,7 @@
 </p:sld>
 </file>
 
-<file path=ppt/slides/slide34.xml><?xml version="1.0" encoding="utf-8"?>
+<file path=ppt/slides/slide35.xml><?xml version="1.0" encoding="utf-8"?>
 <p:sld xmlns:a="http://schemas.openxmlformats.org/drawingml/2006/main" xmlns:p="http://schemas.openxmlformats.org/presentationml/2006/main" xmlns:r="http://schemas.openxmlformats.org/officeDocument/2006/relationships">
   <p:cSld>
     <p:spTree>
@@ -16189,7 +16859,7 @@
                 <a:ea typeface="Noto Sans CJK JP"/>
                 <a:cs typeface="Noto Sans"/>
               </a:rPr>
-              <a:t>追加例5：レビューへの採否（2/3）</a:t>
+              <a:t>追加例7：ヘイトスピーチ</a:t>
             </a:r>
           </a:p>
         </p:txBody>
@@ -16291,7 +16961,7 @@
                 <a:ea typeface="Noto Sans CJK JP"/>
                 <a:cs typeface="Noto Sans"/>
               </a:rPr>
-              <a:t>掲載フィールド：Abstract／原文と日本語</a:t>
+              <a:t>関連する入力・回答／原文と日本語</a:t>
             </a:r>
           </a:p>
         </p:txBody>
@@ -16365,7 +17035,38 @@
                 <a:ea typeface="Noto Sans CJK JP"/>
                 <a:cs typeface="Noto Sans"/>
               </a:rPr>
-              <a:t>Our results show that social preferences differ between subjects who receive low-stakes monetary rewards for their decisions and subjects who consider hypothetical stakes.</a:t>
+              <a:t>New to Twitter-- any men on here know what the process is to get #verified?</a:t>
+            </a:r>
+          </a:p>
+          <a:p>
+            <a:pPr algn="l">
+              <a:lnSpc>
+                <a:spcPts val="2201"/>
+              </a:lnSpc>
+              <a:spcBef>
+                <a:spcPts val="0"/>
+              </a:spcBef>
+              <a:spcAft>
+                <a:spcPts val="0"/>
+              </a:spcAft>
+              <a:buNone/>
+              <a:defRPr sz="1850" b="0">
+                <a:solidFill>
+                  <a:srgbClr val="303437"/>
+                </a:solidFill>
+                <a:latin typeface="Noto Sans"/>
+              </a:defRPr>
+            </a:pPr>
+            <a:r>
+              <a:rPr sz="1850" b="0" lang="ja-JP" altLang="en-US">
+                <a:solidFill>
+                  <a:srgbClr val="303437"/>
+                </a:solidFill>
+                <a:latin typeface="Noto Sans"/>
+                <a:ea typeface="Noto Sans CJK JP"/>
+                <a:cs typeface="Noto Sans"/>
+              </a:rPr>
+              <a:t>not hate speech</a:t>
             </a:r>
           </a:p>
         </p:txBody>
@@ -16379,7 +17080,7 @@
         <p:spPr>
           <a:xfrm>
             <a:off x="594360" y="2802699"/>
-            <a:ext cx="7955279" cy="614045"/>
+            <a:ext cx="7955279" cy="893635"/>
           </a:xfrm>
           <a:prstGeom prst="rect">
             <a:avLst/>
@@ -16419,7 +17120,38 @@
                 <a:ea typeface="Noto Sans CJK JP"/>
                 <a:cs typeface="Noto Sans"/>
               </a:rPr>
-              <a:t>意思決定に対して少額の金銭報酬を受け取る参加者と、仮想的な報酬を考える参加者では、社会的選好が異なった。</a:t>
+              <a:t>入力：Twitterを始めたばかりです。ここにいる男性で、認証済みになる手続きを知っている人はいますか？</a:t>
+            </a:r>
+          </a:p>
+          <a:p>
+            <a:pPr algn="l">
+              <a:lnSpc>
+                <a:spcPts val="2201"/>
+              </a:lnSpc>
+              <a:spcBef>
+                <a:spcPts val="0"/>
+              </a:spcBef>
+              <a:spcAft>
+                <a:spcPts val="0"/>
+              </a:spcAft>
+              <a:buNone/>
+              <a:defRPr sz="1850" b="0">
+                <a:solidFill>
+                  <a:srgbClr val="303437"/>
+                </a:solidFill>
+                <a:latin typeface="Noto Sans"/>
+              </a:defRPr>
+            </a:pPr>
+            <a:r>
+              <a:rPr sz="1850" b="0" lang="ja-JP" altLang="en-US">
+                <a:solidFill>
+                  <a:srgbClr val="303437"/>
+                </a:solidFill>
+                <a:latin typeface="Noto Sans"/>
+                <a:ea typeface="Noto Sans CJK JP"/>
+                <a:cs typeface="Noto Sans"/>
+              </a:rPr>
+              <a:t>配布ラベル：ヘイトスピーチではない</a:t>
             </a:r>
           </a:p>
         </p:txBody>
@@ -16473,504 +17205,7 @@
                 <a:ea typeface="Noto Sans CJK JP"/>
                 <a:cs typeface="Noto Sans"/>
               </a:rPr>
-              <a:t>[1] ought/raft、改訂9ee50172。2026-10-18参照。 systematic_review_inclusion / train ID 43。</a:t>
-            </a:r>
-            <a:r>
-              <a:rPr sz="810" b="0" lang="ja-JP" altLang="en-US">
-                <a:solidFill>
-                  <a:srgbClr val="626669"/>
-                </a:solidFill>
-                <a:latin typeface="Noto Sans"/>
-                <a:ea typeface="Noto Sans CJK JP"/>
-                <a:cs typeface="Noto Sans"/>
-              </a:rPr>
-              <a:t>  </a:t>
-            </a:r>
-            <a:r>
-              <a:rPr sz="810" b="0" lang="ja-JP" altLang="en-US">
-                <a:solidFill>
-                  <a:srgbClr val="626669"/>
-                </a:solidFill>
-                <a:latin typeface="Noto Sans"/>
-                <a:ea typeface="Noto Sans CJK JP"/>
-                <a:cs typeface="Noto Sans"/>
-                <a:hlinkClick r:id="rId2"/>
-              </a:rPr>
-              <a:t>https://huggingface.co/datasets/ought/raft</a:t>
-            </a:r>
-          </a:p>
-        </p:txBody>
-      </p:sp>
-    </p:spTree>
-  </p:cSld>
-  <p:clrMapOvr>
-    <a:masterClrMapping/>
-  </p:clrMapOvr>
-</p:sld>
-</file>
-
-<file path=ppt/slides/slide35.xml><?xml version="1.0" encoding="utf-8"?>
-<p:sld xmlns:a="http://schemas.openxmlformats.org/drawingml/2006/main" xmlns:p="http://schemas.openxmlformats.org/presentationml/2006/main" xmlns:r="http://schemas.openxmlformats.org/officeDocument/2006/relationships">
-  <p:cSld>
-    <p:spTree>
-      <p:nvGrpSpPr>
-        <p:cNvPr id="1" name=""/>
-        <p:cNvGrpSpPr/>
-        <p:nvPr/>
-      </p:nvGrpSpPr>
-      <p:grpSpPr/>
-      <p:sp>
-        <p:nvSpPr>
-          <p:cNvPr id="2" name="Title 1"/>
-          <p:cNvSpPr>
-            <a:spLocks noGrp="1"/>
-          </p:cNvSpPr>
-          <p:nvPr>
-            <p:ph type="title"/>
-          </p:nvPr>
-        </p:nvSpPr>
-        <p:spPr>
-          <a:xfrm>
-            <a:off x="468172" y="650138"/>
-            <a:ext cx="8206740" cy="616305"/>
-          </a:xfrm>
-        </p:spPr>
-        <p:txBody>
-          <a:bodyPr wrap="square" lIns="0" rIns="0" tIns="0" bIns="0">
-            <a:noAutofit/>
-          </a:bodyPr>
-          <a:lstStyle/>
-          <a:p>
-            <a:pPr algn="l">
-              <a:lnSpc>
-                <a:spcPct val="110000"/>
-              </a:lnSpc>
-              <a:buNone/>
-              <a:defRPr sz="2800" b="0">
-                <a:solidFill>
-                  <a:srgbClr val="303437"/>
-                </a:solidFill>
-                <a:latin typeface="Noto Sans"/>
-              </a:defRPr>
-            </a:pPr>
-            <a:r>
-              <a:rPr sz="2800" b="1" lang="ja-JP" altLang="en-US">
-                <a:solidFill>
-                  <a:srgbClr val="303437"/>
-                </a:solidFill>
-                <a:latin typeface="Noto Sans"/>
-                <a:ea typeface="Noto Sans CJK JP"/>
-                <a:cs typeface="Noto Sans"/>
-              </a:rPr>
-              <a:t>追加例5：レビューへの採否（3/3）</a:t>
-            </a:r>
-          </a:p>
-        </p:txBody>
-      </p:sp>
-      <p:sp>
-        <p:nvSpPr>
-          <p:cNvPr id="3" name="Title 2"/>
-          <p:cNvSpPr>
-            <a:spLocks noGrp="1"/>
-          </p:cNvSpPr>
-          <p:nvPr>
-            <p:ph type="title" idx="2"/>
-          </p:nvPr>
-        </p:nvSpPr>
-        <p:spPr>
-          <a:xfrm>
-            <a:off x="75895" y="0"/>
-            <a:ext cx="8115300" cy="480060"/>
-          </a:xfrm>
-        </p:spPr>
-        <p:txBody>
-          <a:bodyPr wrap="square" lIns="0" rIns="0" tIns="0" bIns="0" anchor="ctr">
-            <a:noAutofit/>
-          </a:bodyPr>
-          <a:lstStyle/>
-          <a:p>
-            <a:pPr algn="l">
-              <a:lnSpc>
-                <a:spcPct val="110000"/>
-              </a:lnSpc>
-              <a:buNone/>
-              <a:defRPr sz="1400" b="0">
-                <a:solidFill>
-                  <a:srgbClr val="303437"/>
-                </a:solidFill>
-                <a:latin typeface="Noto Sans"/>
-              </a:defRPr>
-            </a:pPr>
-            <a:r>
-              <a:rPr sz="1400" b="1" lang="ja-JP" altLang="en-US">
-                <a:solidFill>
-                  <a:srgbClr val="FFFEF8"/>
-                </a:solidFill>
-                <a:latin typeface="Noto Sans"/>
-                <a:ea typeface="Noto Sans CJK JP"/>
-                <a:cs typeface="Noto Sans"/>
-              </a:rPr>
-              <a:t>Appendix: 1. 題材の異なる追加例</a:t>
-            </a:r>
-          </a:p>
-        </p:txBody>
-      </p:sp>
-      <p:sp>
-        <p:nvSpPr>
-          <p:cNvPr id="4" name="TextBox 3"/>
-          <p:cNvSpPr txBox="1"/>
-          <p:nvPr/>
-        </p:nvSpPr>
-        <p:spPr>
-          <a:xfrm>
-            <a:off x="548640" y="1399032"/>
-            <a:ext cx="8046720" cy="201168"/>
-          </a:xfrm>
-          <a:prstGeom prst="rect">
-            <a:avLst/>
-          </a:prstGeom>
-          <a:noFill/>
-        </p:spPr>
-        <p:txBody>
-          <a:bodyPr wrap="square" lIns="0" rIns="0" tIns="0" bIns="0">
-            <a:noAutofit/>
-          </a:bodyPr>
-          <a:lstStyle/>
-          <a:p>
-            <a:pPr algn="l">
-              <a:lnSpc>
-                <a:spcPct val="117000"/>
-              </a:lnSpc>
-              <a:spcBef>
-                <a:spcPts val="0"/>
-              </a:spcBef>
-              <a:spcAft>
-                <a:spcPts val="0"/>
-              </a:spcAft>
-              <a:buNone/>
-              <a:defRPr sz="1200" b="0">
-                <a:solidFill>
-                  <a:srgbClr val="303437"/>
-                </a:solidFill>
-                <a:latin typeface="Noto Sans"/>
-              </a:defRPr>
-            </a:pPr>
-            <a:r>
-              <a:rPr sz="1200" b="0" lang="ja-JP" altLang="en-US">
-                <a:solidFill>
-                  <a:srgbClr val="626669"/>
-                </a:solidFill>
-                <a:latin typeface="Noto Sans"/>
-                <a:ea typeface="Noto Sans CJK JP"/>
-                <a:cs typeface="Noto Sans"/>
-              </a:rPr>
-              <a:t>掲載フィールド：Title・Abstract・Label／左：原文　右：日本語</a:t>
-            </a:r>
-          </a:p>
-        </p:txBody>
-      </p:sp>
-      <p:sp>
-        <p:nvSpPr>
-          <p:cNvPr id="5" name="quote-frame"/>
-          <p:cNvSpPr/>
-          <p:nvPr/>
-        </p:nvSpPr>
-        <p:spPr>
-          <a:xfrm>
-            <a:off x="548640" y="1655064"/>
-            <a:ext cx="3858768" cy="2211133"/>
-          </a:xfrm>
-          <a:prstGeom prst="rect">
-            <a:avLst/>
-          </a:prstGeom>
-          <a:solidFill>
-            <a:srgbClr val="EBEDEB"/>
-          </a:solidFill>
-          <a:ln>
-            <a:noFill/>
-          </a:ln>
-          <a:effectLst/>
-        </p:spPr>
-        <p:style>
-          <a:lnRef idx="1">
-            <a:schemeClr val="accent1"/>
-          </a:lnRef>
-          <a:fillRef idx="3">
-            <a:schemeClr val="accent1"/>
-          </a:fillRef>
-          <a:effectRef idx="0">
-            <a:schemeClr val="accent1"/>
-          </a:effectRef>
-          <a:fontRef idx="minor">
-            <a:schemeClr val="lt1"/>
-          </a:fontRef>
-        </p:style>
-        <p:txBody>
-          <a:bodyPr rtlCol="0" anchor="ctr" wrap="square" lIns="177800" rIns="177800" tIns="101600" bIns="127000">
-            <a:noAutofit/>
-          </a:bodyPr>
-          <a:lstStyle/>
-          <a:p>
-            <a:pPr algn="l">
-              <a:lnSpc>
-                <a:spcPts val="2201"/>
-              </a:lnSpc>
-              <a:spcBef>
-                <a:spcPts val="0"/>
-              </a:spcBef>
-              <a:spcAft>
-                <a:spcPts val="0"/>
-              </a:spcAft>
-              <a:buNone/>
-              <a:defRPr sz="1850" b="0">
-                <a:solidFill>
-                  <a:srgbClr val="303437"/>
-                </a:solidFill>
-                <a:latin typeface="Noto Sans"/>
-              </a:defRPr>
-            </a:pPr>
-            <a:r>
-              <a:rPr sz="1850" b="0" lang="ja-JP" altLang="en-US">
-                <a:solidFill>
-                  <a:srgbClr val="303437"/>
-                </a:solidFill>
-                <a:latin typeface="Noto Sans"/>
-                <a:ea typeface="Noto Sans CJK JP"/>
-                <a:cs typeface="Noto Sans"/>
-              </a:rPr>
-              <a:t>Our findings indicate that, apart from incentives, gender plays an important role for the categorization of different social preferences.</a:t>
-            </a:r>
-          </a:p>
-          <a:p>
-            <a:pPr algn="l">
-              <a:lnSpc>
-                <a:spcPts val="2201"/>
-              </a:lnSpc>
-              <a:spcBef>
-                <a:spcPts val="0"/>
-              </a:spcBef>
-              <a:spcAft>
-                <a:spcPts val="0"/>
-              </a:spcAft>
-              <a:buNone/>
-              <a:defRPr sz="1850" b="0">
-                <a:solidFill>
-                  <a:srgbClr val="303437"/>
-                </a:solidFill>
-                <a:latin typeface="Noto Sans"/>
-              </a:defRPr>
-            </a:pPr>
-            <a:r>
-              <a:rPr sz="1850" b="0" lang="ja-JP" altLang="en-US">
-                <a:solidFill>
-                  <a:srgbClr val="303437"/>
-                </a:solidFill>
-                <a:latin typeface="Noto Sans"/>
-                <a:ea typeface="Noto Sans CJK JP"/>
-                <a:cs typeface="Noto Sans"/>
-              </a:rPr>
-              <a:t>© 2015. The authors license.</a:t>
-            </a:r>
-          </a:p>
-          <a:p>
-            <a:pPr algn="l">
-              <a:lnSpc>
-                <a:spcPts val="2201"/>
-              </a:lnSpc>
-              <a:spcBef>
-                <a:spcPts val="0"/>
-              </a:spcBef>
-              <a:spcAft>
-                <a:spcPts val="0"/>
-              </a:spcAft>
-              <a:buNone/>
-              <a:defRPr sz="1850" b="0">
-                <a:solidFill>
-                  <a:srgbClr val="303437"/>
-                </a:solidFill>
-                <a:latin typeface="Noto Sans"/>
-              </a:defRPr>
-            </a:pPr>
-            <a:r>
-              <a:rPr sz="1850" b="0" lang="ja-JP" altLang="en-US">
-                <a:solidFill>
-                  <a:srgbClr val="303437"/>
-                </a:solidFill>
-                <a:latin typeface="Noto Sans"/>
-                <a:ea typeface="Noto Sans CJK JP"/>
-                <a:cs typeface="Noto Sans"/>
-              </a:rPr>
-              <a:t>not included</a:t>
-            </a:r>
-          </a:p>
-        </p:txBody>
-      </p:sp>
-      <p:sp>
-        <p:nvSpPr>
-          <p:cNvPr id="6" name="TextBox 5"/>
-          <p:cNvSpPr txBox="1"/>
-          <p:nvPr/>
-        </p:nvSpPr>
-        <p:spPr>
-          <a:xfrm>
-            <a:off x="4690872" y="1673352"/>
-            <a:ext cx="3858768" cy="1732407"/>
-          </a:xfrm>
-          <a:prstGeom prst="rect">
-            <a:avLst/>
-          </a:prstGeom>
-          <a:noFill/>
-        </p:spPr>
-        <p:txBody>
-          <a:bodyPr wrap="square" lIns="0" rIns="0" tIns="0" bIns="0" anchor="t">
-            <a:noAutofit/>
-          </a:bodyPr>
-          <a:lstStyle/>
-          <a:p>
-            <a:pPr algn="l">
-              <a:lnSpc>
-                <a:spcPts val="2201"/>
-              </a:lnSpc>
-              <a:spcBef>
-                <a:spcPts val="0"/>
-              </a:spcBef>
-              <a:spcAft>
-                <a:spcPts val="0"/>
-              </a:spcAft>
-              <a:buNone/>
-              <a:defRPr sz="1850" b="0">
-                <a:solidFill>
-                  <a:srgbClr val="303437"/>
-                </a:solidFill>
-                <a:latin typeface="Noto Sans"/>
-              </a:defRPr>
-            </a:pPr>
-            <a:r>
-              <a:rPr sz="1850" b="0" lang="ja-JP" altLang="en-US">
-                <a:solidFill>
-                  <a:srgbClr val="303437"/>
-                </a:solidFill>
-                <a:latin typeface="Noto Sans"/>
-                <a:ea typeface="Noto Sans CJK JP"/>
-                <a:cs typeface="Noto Sans"/>
-              </a:rPr>
-              <a:t>要旨：報酬に加え、性別も社会的選好の分類に重要な役割を持つことが示された。</a:t>
-            </a:r>
-          </a:p>
-          <a:p>
-            <a:pPr algn="l">
-              <a:lnSpc>
-                <a:spcPts val="2201"/>
-              </a:lnSpc>
-              <a:spcBef>
-                <a:spcPts val="0"/>
-              </a:spcBef>
-              <a:spcAft>
-                <a:spcPts val="0"/>
-              </a:spcAft>
-              <a:buNone/>
-              <a:defRPr sz="1850" b="0">
-                <a:solidFill>
-                  <a:srgbClr val="303437"/>
-                </a:solidFill>
-                <a:latin typeface="Noto Sans"/>
-              </a:defRPr>
-            </a:pPr>
-            <a:r>
-              <a:rPr sz="1850" b="0" lang="ja-JP" altLang="en-US">
-                <a:solidFill>
-                  <a:srgbClr val="303437"/>
-                </a:solidFill>
-                <a:latin typeface="Noto Sans"/>
-                <a:ea typeface="Noto Sans CJK JP"/>
-                <a:cs typeface="Noto Sans"/>
-              </a:rPr>
-              <a:t>要旨：© 2015。著者によるライセンス表記。</a:t>
-            </a:r>
-          </a:p>
-          <a:p>
-            <a:pPr algn="l">
-              <a:lnSpc>
-                <a:spcPts val="2201"/>
-              </a:lnSpc>
-              <a:spcBef>
-                <a:spcPts val="0"/>
-              </a:spcBef>
-              <a:spcAft>
-                <a:spcPts val="0"/>
-              </a:spcAft>
-              <a:buNone/>
-              <a:defRPr sz="1850" b="0">
-                <a:solidFill>
-                  <a:srgbClr val="303437"/>
-                </a:solidFill>
-                <a:latin typeface="Noto Sans"/>
-              </a:defRPr>
-            </a:pPr>
-            <a:r>
-              <a:rPr sz="1850" b="0" lang="ja-JP" altLang="en-US">
-                <a:solidFill>
-                  <a:srgbClr val="303437"/>
-                </a:solidFill>
-                <a:latin typeface="Noto Sans"/>
-                <a:ea typeface="Noto Sans CJK JP"/>
-                <a:cs typeface="Noto Sans"/>
-              </a:rPr>
-              <a:t>配布ラベル：レビューに含めない</a:t>
-            </a:r>
-          </a:p>
-        </p:txBody>
-      </p:sp>
-      <p:sp>
-        <p:nvSpPr>
-          <p:cNvPr id="7" name="sources"/>
-          <p:cNvSpPr txBox="1"/>
-          <p:nvPr/>
-        </p:nvSpPr>
-        <p:spPr>
-          <a:xfrm>
-            <a:off x="502920" y="4700016"/>
-            <a:ext cx="8183879" cy="530352"/>
-          </a:xfrm>
-          <a:prstGeom prst="rect">
-            <a:avLst/>
-          </a:prstGeom>
-          <a:noFill/>
-        </p:spPr>
-        <p:txBody>
-          <a:bodyPr wrap="square" lIns="0" rIns="0" tIns="0" bIns="0">
-            <a:noAutofit/>
-          </a:bodyPr>
-          <a:lstStyle/>
-          <a:p>
-            <a:pPr algn="l">
-              <a:lnSpc>
-                <a:spcPts val="940"/>
-              </a:lnSpc>
-              <a:spcBef>
-                <a:spcPts val="0"/>
-              </a:spcBef>
-              <a:spcAft>
-                <a:spcPts val="140"/>
-              </a:spcAft>
-              <a:buNone/>
-              <a:defRPr sz="810" b="0">
-                <a:solidFill>
-                  <a:srgbClr val="303437"/>
-                </a:solidFill>
-                <a:latin typeface="Noto Sans"/>
-              </a:defRPr>
-            </a:pPr>
-            <a:r>
-              <a:rPr sz="810" b="0" lang="ja-JP" altLang="en-US">
-                <a:solidFill>
-                  <a:srgbClr val="626669"/>
-                </a:solidFill>
-                <a:latin typeface="Noto Sans"/>
-                <a:ea typeface="Noto Sans CJK JP"/>
-                <a:cs typeface="Noto Sans"/>
-              </a:rPr>
-              <a:t>[1] ought/raft、改訂9ee50172。2026-10-18参照。 systematic_review_inclusion / train ID 43。</a:t>
+              <a:t>[1] ought/raft、改訂9ee50172。2026-10-18参照。 tweet_eval_hate / train ID 0。</a:t>
             </a:r>
             <a:r>
               <a:rPr sz="810" b="0" lang="ja-JP" altLang="en-US">
@@ -17007,1063 +17242,6 @@
 </file>
 
 <file path=ppt/slides/slide36.xml><?xml version="1.0" encoding="utf-8"?>
-<p:sld xmlns:a="http://schemas.openxmlformats.org/drawingml/2006/main" xmlns:p="http://schemas.openxmlformats.org/presentationml/2006/main" xmlns:r="http://schemas.openxmlformats.org/officeDocument/2006/relationships">
-  <p:cSld>
-    <p:spTree>
-      <p:nvGrpSpPr>
-        <p:cNvPr id="1" name=""/>
-        <p:cNvGrpSpPr/>
-        <p:nvPr/>
-      </p:nvGrpSpPr>
-      <p:grpSpPr/>
-      <p:sp>
-        <p:nvSpPr>
-          <p:cNvPr id="2" name="Title 1"/>
-          <p:cNvSpPr>
-            <a:spLocks noGrp="1"/>
-          </p:cNvSpPr>
-          <p:nvPr>
-            <p:ph type="title"/>
-          </p:nvPr>
-        </p:nvSpPr>
-        <p:spPr>
-          <a:xfrm>
-            <a:off x="468172" y="650138"/>
-            <a:ext cx="8206740" cy="616305"/>
-          </a:xfrm>
-        </p:spPr>
-        <p:txBody>
-          <a:bodyPr wrap="square" lIns="0" rIns="0" tIns="0" bIns="0">
-            <a:noAutofit/>
-          </a:bodyPr>
-          <a:lstStyle/>
-          <a:p>
-            <a:pPr algn="l">
-              <a:lnSpc>
-                <a:spcPct val="110000"/>
-              </a:lnSpc>
-              <a:buNone/>
-              <a:defRPr sz="2800" b="0">
-                <a:solidFill>
-                  <a:srgbClr val="303437"/>
-                </a:solidFill>
-                <a:latin typeface="Noto Sans"/>
-              </a:defRPr>
-            </a:pPr>
-            <a:r>
-              <a:rPr sz="2800" b="1" lang="ja-JP" altLang="en-US">
-                <a:solidFill>
-                  <a:srgbClr val="303437"/>
-                </a:solidFill>
-                <a:latin typeface="Noto Sans"/>
-                <a:ea typeface="Noto Sans CJK JP"/>
-                <a:cs typeface="Noto Sans"/>
-              </a:rPr>
-              <a:t>追加例6：変革的AIの安全性</a:t>
-            </a:r>
-          </a:p>
-        </p:txBody>
-      </p:sp>
-      <p:sp>
-        <p:nvSpPr>
-          <p:cNvPr id="3" name="Title 2"/>
-          <p:cNvSpPr>
-            <a:spLocks noGrp="1"/>
-          </p:cNvSpPr>
-          <p:nvPr>
-            <p:ph type="title" idx="2"/>
-          </p:nvPr>
-        </p:nvSpPr>
-        <p:spPr>
-          <a:xfrm>
-            <a:off x="75895" y="0"/>
-            <a:ext cx="8115300" cy="480060"/>
-          </a:xfrm>
-        </p:spPr>
-        <p:txBody>
-          <a:bodyPr wrap="square" lIns="0" rIns="0" tIns="0" bIns="0" anchor="ctr">
-            <a:noAutofit/>
-          </a:bodyPr>
-          <a:lstStyle/>
-          <a:p>
-            <a:pPr algn="l">
-              <a:lnSpc>
-                <a:spcPct val="110000"/>
-              </a:lnSpc>
-              <a:buNone/>
-              <a:defRPr sz="1400" b="0">
-                <a:solidFill>
-                  <a:srgbClr val="303437"/>
-                </a:solidFill>
-                <a:latin typeface="Noto Sans"/>
-              </a:defRPr>
-            </a:pPr>
-            <a:r>
-              <a:rPr sz="1400" b="1" lang="ja-JP" altLang="en-US">
-                <a:solidFill>
-                  <a:srgbClr val="FFFEF8"/>
-                </a:solidFill>
-                <a:latin typeface="Noto Sans"/>
-                <a:ea typeface="Noto Sans CJK JP"/>
-                <a:cs typeface="Noto Sans"/>
-              </a:rPr>
-              <a:t>Appendix: 1. 題材の異なる追加例</a:t>
-            </a:r>
-          </a:p>
-        </p:txBody>
-      </p:sp>
-      <p:sp>
-        <p:nvSpPr>
-          <p:cNvPr id="4" name="TextBox 3"/>
-          <p:cNvSpPr txBox="1"/>
-          <p:nvPr/>
-        </p:nvSpPr>
-        <p:spPr>
-          <a:xfrm>
-            <a:off x="548640" y="1399032"/>
-            <a:ext cx="8046720" cy="201168"/>
-          </a:xfrm>
-          <a:prstGeom prst="rect">
-            <a:avLst/>
-          </a:prstGeom>
-          <a:noFill/>
-        </p:spPr>
-        <p:txBody>
-          <a:bodyPr wrap="square" lIns="0" rIns="0" tIns="0" bIns="0">
-            <a:noAutofit/>
-          </a:bodyPr>
-          <a:lstStyle/>
-          <a:p>
-            <a:pPr algn="l">
-              <a:lnSpc>
-                <a:spcPct val="117000"/>
-              </a:lnSpc>
-              <a:spcBef>
-                <a:spcPts val="0"/>
-              </a:spcBef>
-              <a:spcAft>
-                <a:spcPts val="0"/>
-              </a:spcAft>
-              <a:buNone/>
-              <a:defRPr sz="1200" b="0">
-                <a:solidFill>
-                  <a:srgbClr val="303437"/>
-                </a:solidFill>
-                <a:latin typeface="Noto Sans"/>
-              </a:defRPr>
-            </a:pPr>
-            <a:r>
-              <a:rPr sz="1200" b="0" lang="ja-JP" altLang="en-US">
-                <a:solidFill>
-                  <a:srgbClr val="626669"/>
-                </a:solidFill>
-                <a:latin typeface="Noto Sans"/>
-                <a:ea typeface="Noto Sans CJK JP"/>
-                <a:cs typeface="Noto Sans"/>
-              </a:rPr>
-              <a:t>関連する入力・回答／左：原文　右：日本語</a:t>
-            </a:r>
-          </a:p>
-        </p:txBody>
-      </p:sp>
-      <p:sp>
-        <p:nvSpPr>
-          <p:cNvPr id="5" name="quote-frame"/>
-          <p:cNvSpPr/>
-          <p:nvPr/>
-        </p:nvSpPr>
-        <p:spPr>
-          <a:xfrm>
-            <a:off x="548640" y="1655064"/>
-            <a:ext cx="3858768" cy="2211133"/>
-          </a:xfrm>
-          <a:prstGeom prst="rect">
-            <a:avLst/>
-          </a:prstGeom>
-          <a:solidFill>
-            <a:srgbClr val="EBEDEB"/>
-          </a:solidFill>
-          <a:ln>
-            <a:noFill/>
-          </a:ln>
-          <a:effectLst/>
-        </p:spPr>
-        <p:style>
-          <a:lnRef idx="1">
-            <a:schemeClr val="accent1"/>
-          </a:lnRef>
-          <a:fillRef idx="3">
-            <a:schemeClr val="accent1"/>
-          </a:fillRef>
-          <a:effectRef idx="0">
-            <a:schemeClr val="accent1"/>
-          </a:effectRef>
-          <a:fontRef idx="minor">
-            <a:schemeClr val="lt1"/>
-          </a:fontRef>
-        </p:style>
-        <p:txBody>
-          <a:bodyPr rtlCol="0" anchor="ctr" wrap="square" lIns="177800" rIns="177800" tIns="101600" bIns="127000">
-            <a:noAutofit/>
-          </a:bodyPr>
-          <a:lstStyle/>
-          <a:p>
-            <a:pPr algn="l">
-              <a:lnSpc>
-                <a:spcPts val="2201"/>
-              </a:lnSpc>
-              <a:spcBef>
-                <a:spcPts val="0"/>
-              </a:spcBef>
-              <a:spcAft>
-                <a:spcPts val="0"/>
-              </a:spcAft>
-              <a:buNone/>
-              <a:defRPr sz="1850" b="0">
-                <a:solidFill>
-                  <a:srgbClr val="303437"/>
-                </a:solidFill>
-                <a:latin typeface="Noto Sans"/>
-              </a:defRPr>
-            </a:pPr>
-            <a:r>
-              <a:rPr sz="1850" b="0" lang="ja-JP" altLang="en-US">
-                <a:solidFill>
-                  <a:srgbClr val="303437"/>
-                </a:solidFill>
-                <a:latin typeface="Noto Sans"/>
-                <a:ea typeface="Noto Sans CJK JP"/>
-                <a:cs typeface="Noto Sans"/>
-              </a:rPr>
-              <a:t>Title: Economics of the singularity</a:t>
-            </a:r>
-          </a:p>
-          <a:p>
-            <a:pPr algn="l">
-              <a:lnSpc>
-                <a:spcPts val="2201"/>
-              </a:lnSpc>
-              <a:spcBef>
-                <a:spcPts val="0"/>
-              </a:spcBef>
-              <a:spcAft>
-                <a:spcPts val="0"/>
-              </a:spcAft>
-              <a:buNone/>
-              <a:defRPr sz="1850" b="0">
-                <a:solidFill>
-                  <a:srgbClr val="303437"/>
-                </a:solidFill>
-                <a:latin typeface="Noto Sans"/>
-              </a:defRPr>
-            </a:pPr>
-            <a:r>
-              <a:rPr sz="1850" b="0" lang="ja-JP" altLang="en-US">
-                <a:solidFill>
-                  <a:srgbClr val="303437"/>
-                </a:solidFill>
-                <a:latin typeface="Noto Sans"/>
-                <a:ea typeface="Noto Sans CJK JP"/>
-                <a:cs typeface="Noto Sans"/>
-              </a:rPr>
-              <a:t>Author: Hanson, Robin</a:t>
-            </a:r>
-          </a:p>
-          <a:p>
-            <a:pPr algn="l">
-              <a:lnSpc>
-                <a:spcPts val="2201"/>
-              </a:lnSpc>
-              <a:spcBef>
-                <a:spcPts val="0"/>
-              </a:spcBef>
-              <a:spcAft>
-                <a:spcPts val="0"/>
-              </a:spcAft>
-              <a:buNone/>
-              <a:defRPr sz="1850" b="0">
-                <a:solidFill>
-                  <a:srgbClr val="303437"/>
-                </a:solidFill>
-                <a:latin typeface="Noto Sans"/>
-              </a:defRPr>
-            </a:pPr>
-            <a:r>
-              <a:rPr sz="1850" b="0" lang="ja-JP" altLang="en-US">
-                <a:solidFill>
-                  <a:srgbClr val="303437"/>
-                </a:solidFill>
-                <a:latin typeface="Noto Sans"/>
-                <a:ea typeface="Noto Sans CJK JP"/>
-                <a:cs typeface="Noto Sans"/>
-              </a:rPr>
-              <a:t>Publication Year: 2008</a:t>
-            </a:r>
-          </a:p>
-          <a:p>
-            <a:pPr algn="l">
-              <a:lnSpc>
-                <a:spcPts val="2201"/>
-              </a:lnSpc>
-              <a:spcBef>
-                <a:spcPts val="0"/>
-              </a:spcBef>
-              <a:spcAft>
-                <a:spcPts val="0"/>
-              </a:spcAft>
-              <a:buNone/>
-              <a:defRPr sz="1850" b="0">
-                <a:solidFill>
-                  <a:srgbClr val="303437"/>
-                </a:solidFill>
-                <a:latin typeface="Noto Sans"/>
-              </a:defRPr>
-            </a:pPr>
-            <a:r>
-              <a:rPr sz="1850" b="0" lang="ja-JP" altLang="en-US">
-                <a:solidFill>
-                  <a:srgbClr val="303437"/>
-                </a:solidFill>
-                <a:latin typeface="Noto Sans"/>
-                <a:ea typeface="Noto Sans CJK JP"/>
-                <a:cs typeface="Noto Sans"/>
-              </a:rPr>
-              <a:t>Publication Title: IEEE Spectrum</a:t>
-            </a:r>
-          </a:p>
-          <a:p>
-            <a:pPr algn="l">
-              <a:lnSpc>
-                <a:spcPts val="2201"/>
-              </a:lnSpc>
-              <a:spcBef>
-                <a:spcPts val="0"/>
-              </a:spcBef>
-              <a:spcAft>
-                <a:spcPts val="0"/>
-              </a:spcAft>
-              <a:buNone/>
-              <a:defRPr sz="1850" b="0">
-                <a:solidFill>
-                  <a:srgbClr val="303437"/>
-                </a:solidFill>
-                <a:latin typeface="Noto Sans"/>
-              </a:defRPr>
-            </a:pPr>
-            <a:r>
-              <a:rPr sz="1850" b="0" lang="ja-JP" altLang="en-US">
-                <a:solidFill>
-                  <a:srgbClr val="303437"/>
-                </a:solidFill>
-                <a:latin typeface="Noto Sans"/>
-                <a:ea typeface="Noto Sans CJK JP"/>
-                <a:cs typeface="Noto Sans"/>
-              </a:rPr>
-              <a:t>TAI safety research</a:t>
-            </a:r>
-          </a:p>
-        </p:txBody>
-      </p:sp>
-      <p:sp>
-        <p:nvSpPr>
-          <p:cNvPr id="6" name="TextBox 5"/>
-          <p:cNvSpPr txBox="1"/>
-          <p:nvPr/>
-        </p:nvSpPr>
-        <p:spPr>
-          <a:xfrm>
-            <a:off x="4690872" y="1673352"/>
-            <a:ext cx="3858768" cy="1732407"/>
-          </a:xfrm>
-          <a:prstGeom prst="rect">
-            <a:avLst/>
-          </a:prstGeom>
-          <a:noFill/>
-        </p:spPr>
-        <p:txBody>
-          <a:bodyPr wrap="square" lIns="0" rIns="0" tIns="0" bIns="0" anchor="t">
-            <a:noAutofit/>
-          </a:bodyPr>
-          <a:lstStyle/>
-          <a:p>
-            <a:pPr algn="l">
-              <a:lnSpc>
-                <a:spcPts val="2201"/>
-              </a:lnSpc>
-              <a:spcBef>
-                <a:spcPts val="0"/>
-              </a:spcBef>
-              <a:spcAft>
-                <a:spcPts val="0"/>
-              </a:spcAft>
-              <a:buNone/>
-              <a:defRPr sz="1850" b="0">
-                <a:solidFill>
-                  <a:srgbClr val="303437"/>
-                </a:solidFill>
-                <a:latin typeface="Noto Sans"/>
-              </a:defRPr>
-            </a:pPr>
-            <a:r>
-              <a:rPr sz="1850" b="0" lang="ja-JP" altLang="en-US">
-                <a:solidFill>
-                  <a:srgbClr val="303437"/>
-                </a:solidFill>
-                <a:latin typeface="Noto Sans"/>
-                <a:ea typeface="Noto Sans CJK JP"/>
-                <a:cs typeface="Noto Sans"/>
-              </a:rPr>
-              <a:t>入力（抜粋）：題名：シンギュラリティの経済学</a:t>
-            </a:r>
-          </a:p>
-          <a:p>
-            <a:pPr algn="l">
-              <a:lnSpc>
-                <a:spcPts val="2201"/>
-              </a:lnSpc>
-              <a:spcBef>
-                <a:spcPts val="0"/>
-              </a:spcBef>
-              <a:spcAft>
-                <a:spcPts val="0"/>
-              </a:spcAft>
-              <a:buNone/>
-              <a:defRPr sz="1850" b="0">
-                <a:solidFill>
-                  <a:srgbClr val="303437"/>
-                </a:solidFill>
-                <a:latin typeface="Noto Sans"/>
-              </a:defRPr>
-            </a:pPr>
-            <a:r>
-              <a:rPr sz="1850" b="0" lang="ja-JP" altLang="en-US">
-                <a:solidFill>
-                  <a:srgbClr val="303437"/>
-                </a:solidFill>
-                <a:latin typeface="Noto Sans"/>
-                <a:ea typeface="Noto Sans CJK JP"/>
-                <a:cs typeface="Noto Sans"/>
-              </a:rPr>
-              <a:t>著者：ロビン・ハンソン</a:t>
-            </a:r>
-          </a:p>
-          <a:p>
-            <a:pPr algn="l">
-              <a:lnSpc>
-                <a:spcPts val="2201"/>
-              </a:lnSpc>
-              <a:spcBef>
-                <a:spcPts val="0"/>
-              </a:spcBef>
-              <a:spcAft>
-                <a:spcPts val="0"/>
-              </a:spcAft>
-              <a:buNone/>
-              <a:defRPr sz="1850" b="0">
-                <a:solidFill>
-                  <a:srgbClr val="303437"/>
-                </a:solidFill>
-                <a:latin typeface="Noto Sans"/>
-              </a:defRPr>
-            </a:pPr>
-            <a:r>
-              <a:rPr sz="1850" b="0" lang="ja-JP" altLang="en-US">
-                <a:solidFill>
-                  <a:srgbClr val="303437"/>
-                </a:solidFill>
-                <a:latin typeface="Noto Sans"/>
-                <a:ea typeface="Noto Sans CJK JP"/>
-                <a:cs typeface="Noto Sans"/>
-              </a:rPr>
-              <a:t>発表年：2008年</a:t>
-            </a:r>
-          </a:p>
-          <a:p>
-            <a:pPr algn="l">
-              <a:lnSpc>
-                <a:spcPts val="2201"/>
-              </a:lnSpc>
-              <a:spcBef>
-                <a:spcPts val="0"/>
-              </a:spcBef>
-              <a:spcAft>
-                <a:spcPts val="0"/>
-              </a:spcAft>
-              <a:buNone/>
-              <a:defRPr sz="1850" b="0">
-                <a:solidFill>
-                  <a:srgbClr val="303437"/>
-                </a:solidFill>
-                <a:latin typeface="Noto Sans"/>
-              </a:defRPr>
-            </a:pPr>
-            <a:r>
-              <a:rPr sz="1850" b="0" lang="ja-JP" altLang="en-US">
-                <a:solidFill>
-                  <a:srgbClr val="303437"/>
-                </a:solidFill>
-                <a:latin typeface="Noto Sans"/>
-                <a:ea typeface="Noto Sans CJK JP"/>
-                <a:cs typeface="Noto Sans"/>
-              </a:rPr>
-              <a:t>掲載先：IEEE Spectrum</a:t>
-            </a:r>
-          </a:p>
-          <a:p>
-            <a:pPr algn="l">
-              <a:lnSpc>
-                <a:spcPts val="2201"/>
-              </a:lnSpc>
-              <a:spcBef>
-                <a:spcPts val="0"/>
-              </a:spcBef>
-              <a:spcAft>
-                <a:spcPts val="0"/>
-              </a:spcAft>
-              <a:buNone/>
-              <a:defRPr sz="1850" b="0">
-                <a:solidFill>
-                  <a:srgbClr val="303437"/>
-                </a:solidFill>
-                <a:latin typeface="Noto Sans"/>
-              </a:defRPr>
-            </a:pPr>
-            <a:r>
-              <a:rPr sz="1850" b="0" lang="ja-JP" altLang="en-US">
-                <a:solidFill>
-                  <a:srgbClr val="303437"/>
-                </a:solidFill>
-                <a:latin typeface="Noto Sans"/>
-                <a:ea typeface="Noto Sans CJK JP"/>
-                <a:cs typeface="Noto Sans"/>
-              </a:rPr>
-              <a:t>配布ラベル：
-変革的AIの安全性研究</a:t>
-            </a:r>
-          </a:p>
-        </p:txBody>
-      </p:sp>
-      <p:sp>
-        <p:nvSpPr>
-          <p:cNvPr id="7" name="sources"/>
-          <p:cNvSpPr txBox="1"/>
-          <p:nvPr/>
-        </p:nvSpPr>
-        <p:spPr>
-          <a:xfrm>
-            <a:off x="502920" y="4700016"/>
-            <a:ext cx="8183879" cy="530352"/>
-          </a:xfrm>
-          <a:prstGeom prst="rect">
-            <a:avLst/>
-          </a:prstGeom>
-          <a:noFill/>
-        </p:spPr>
-        <p:txBody>
-          <a:bodyPr wrap="square" lIns="0" rIns="0" tIns="0" bIns="0">
-            <a:noAutofit/>
-          </a:bodyPr>
-          <a:lstStyle/>
-          <a:p>
-            <a:pPr algn="l">
-              <a:lnSpc>
-                <a:spcPts val="940"/>
-              </a:lnSpc>
-              <a:spcBef>
-                <a:spcPts val="0"/>
-              </a:spcBef>
-              <a:spcAft>
-                <a:spcPts val="140"/>
-              </a:spcAft>
-              <a:buNone/>
-              <a:defRPr sz="810" b="0">
-                <a:solidFill>
-                  <a:srgbClr val="303437"/>
-                </a:solidFill>
-                <a:latin typeface="Noto Sans"/>
-              </a:defRPr>
-            </a:pPr>
-            <a:r>
-              <a:rPr sz="810" b="0" lang="ja-JP" altLang="en-US">
-                <a:solidFill>
-                  <a:srgbClr val="626669"/>
-                </a:solidFill>
-                <a:latin typeface="Noto Sans"/>
-                <a:ea typeface="Noto Sans CJK JP"/>
-                <a:cs typeface="Noto Sans"/>
-              </a:rPr>
-              <a:t>[1] ought/raft、改訂9ee50172。2026-10-18参照。 tai_safety_research / train ID 12。</a:t>
-            </a:r>
-            <a:r>
-              <a:rPr sz="810" b="0" lang="ja-JP" altLang="en-US">
-                <a:solidFill>
-                  <a:srgbClr val="626669"/>
-                </a:solidFill>
-                <a:latin typeface="Noto Sans"/>
-                <a:ea typeface="Noto Sans CJK JP"/>
-                <a:cs typeface="Noto Sans"/>
-              </a:rPr>
-              <a:t>  </a:t>
-            </a:r>
-            <a:r>
-              <a:rPr sz="810" b="0" lang="ja-JP" altLang="en-US">
-                <a:solidFill>
-                  <a:srgbClr val="626669"/>
-                </a:solidFill>
-                <a:latin typeface="Noto Sans"/>
-                <a:ea typeface="Noto Sans CJK JP"/>
-                <a:cs typeface="Noto Sans"/>
-                <a:hlinkClick r:id="rId2"/>
-              </a:rPr>
-              <a:t>https://huggingface.co/datasets/ought/raft</a:t>
-            </a:r>
-          </a:p>
-        </p:txBody>
-      </p:sp>
-    </p:spTree>
-  </p:cSld>
-  <p:clrMapOvr>
-    <a:masterClrMapping/>
-  </p:clrMapOvr>
-</p:sld>
-</file>
-
-<file path=ppt/slides/slide37.xml><?xml version="1.0" encoding="utf-8"?>
-<p:sld xmlns:a="http://schemas.openxmlformats.org/drawingml/2006/main" xmlns:p="http://schemas.openxmlformats.org/presentationml/2006/main" xmlns:r="http://schemas.openxmlformats.org/officeDocument/2006/relationships">
-  <p:cSld>
-    <p:spTree>
-      <p:nvGrpSpPr>
-        <p:cNvPr id="1" name=""/>
-        <p:cNvGrpSpPr/>
-        <p:nvPr/>
-      </p:nvGrpSpPr>
-      <p:grpSpPr/>
-      <p:sp>
-        <p:nvSpPr>
-          <p:cNvPr id="2" name="Title 1"/>
-          <p:cNvSpPr>
-            <a:spLocks noGrp="1"/>
-          </p:cNvSpPr>
-          <p:nvPr>
-            <p:ph type="title"/>
-          </p:nvPr>
-        </p:nvSpPr>
-        <p:spPr>
-          <a:xfrm>
-            <a:off x="468172" y="650138"/>
-            <a:ext cx="8206740" cy="616305"/>
-          </a:xfrm>
-        </p:spPr>
-        <p:txBody>
-          <a:bodyPr wrap="square" lIns="0" rIns="0" tIns="0" bIns="0">
-            <a:noAutofit/>
-          </a:bodyPr>
-          <a:lstStyle/>
-          <a:p>
-            <a:pPr algn="l">
-              <a:lnSpc>
-                <a:spcPct val="110000"/>
-              </a:lnSpc>
-              <a:buNone/>
-              <a:defRPr sz="2800" b="0">
-                <a:solidFill>
-                  <a:srgbClr val="303437"/>
-                </a:solidFill>
-                <a:latin typeface="Noto Sans"/>
-              </a:defRPr>
-            </a:pPr>
-            <a:r>
-              <a:rPr sz="2800" b="1" lang="ja-JP" altLang="en-US">
-                <a:solidFill>
-                  <a:srgbClr val="303437"/>
-                </a:solidFill>
-                <a:latin typeface="Noto Sans"/>
-                <a:ea typeface="Noto Sans CJK JP"/>
-                <a:cs typeface="Noto Sans"/>
-              </a:rPr>
-              <a:t>追加例7：ヘイトスピーチ</a:t>
-            </a:r>
-          </a:p>
-        </p:txBody>
-      </p:sp>
-      <p:sp>
-        <p:nvSpPr>
-          <p:cNvPr id="3" name="Title 2"/>
-          <p:cNvSpPr>
-            <a:spLocks noGrp="1"/>
-          </p:cNvSpPr>
-          <p:nvPr>
-            <p:ph type="title" idx="2"/>
-          </p:nvPr>
-        </p:nvSpPr>
-        <p:spPr>
-          <a:xfrm>
-            <a:off x="75895" y="0"/>
-            <a:ext cx="8115300" cy="480060"/>
-          </a:xfrm>
-        </p:spPr>
-        <p:txBody>
-          <a:bodyPr wrap="square" lIns="0" rIns="0" tIns="0" bIns="0" anchor="ctr">
-            <a:noAutofit/>
-          </a:bodyPr>
-          <a:lstStyle/>
-          <a:p>
-            <a:pPr algn="l">
-              <a:lnSpc>
-                <a:spcPct val="110000"/>
-              </a:lnSpc>
-              <a:buNone/>
-              <a:defRPr sz="1400" b="0">
-                <a:solidFill>
-                  <a:srgbClr val="303437"/>
-                </a:solidFill>
-                <a:latin typeface="Noto Sans"/>
-              </a:defRPr>
-            </a:pPr>
-            <a:r>
-              <a:rPr sz="1400" b="1" lang="ja-JP" altLang="en-US">
-                <a:solidFill>
-                  <a:srgbClr val="FFFEF8"/>
-                </a:solidFill>
-                <a:latin typeface="Noto Sans"/>
-                <a:ea typeface="Noto Sans CJK JP"/>
-                <a:cs typeface="Noto Sans"/>
-              </a:rPr>
-              <a:t>Appendix: 1. 題材の異なる追加例</a:t>
-            </a:r>
-          </a:p>
-        </p:txBody>
-      </p:sp>
-      <p:sp>
-        <p:nvSpPr>
-          <p:cNvPr id="4" name="TextBox 3"/>
-          <p:cNvSpPr txBox="1"/>
-          <p:nvPr/>
-        </p:nvSpPr>
-        <p:spPr>
-          <a:xfrm>
-            <a:off x="548640" y="1399032"/>
-            <a:ext cx="8046720" cy="201168"/>
-          </a:xfrm>
-          <a:prstGeom prst="rect">
-            <a:avLst/>
-          </a:prstGeom>
-          <a:noFill/>
-        </p:spPr>
-        <p:txBody>
-          <a:bodyPr wrap="square" lIns="0" rIns="0" tIns="0" bIns="0">
-            <a:noAutofit/>
-          </a:bodyPr>
-          <a:lstStyle/>
-          <a:p>
-            <a:pPr algn="l">
-              <a:lnSpc>
-                <a:spcPct val="117000"/>
-              </a:lnSpc>
-              <a:spcBef>
-                <a:spcPts val="0"/>
-              </a:spcBef>
-              <a:spcAft>
-                <a:spcPts val="0"/>
-              </a:spcAft>
-              <a:buNone/>
-              <a:defRPr sz="1200" b="0">
-                <a:solidFill>
-                  <a:srgbClr val="303437"/>
-                </a:solidFill>
-                <a:latin typeface="Noto Sans"/>
-              </a:defRPr>
-            </a:pPr>
-            <a:r>
-              <a:rPr sz="1200" b="0" lang="ja-JP" altLang="en-US">
-                <a:solidFill>
-                  <a:srgbClr val="626669"/>
-                </a:solidFill>
-                <a:latin typeface="Noto Sans"/>
-                <a:ea typeface="Noto Sans CJK JP"/>
-                <a:cs typeface="Noto Sans"/>
-              </a:rPr>
-              <a:t>関連する入力・回答／原文と日本語</a:t>
-            </a:r>
-          </a:p>
-        </p:txBody>
-      </p:sp>
-      <p:sp>
-        <p:nvSpPr>
-          <p:cNvPr id="5" name="quote-frame"/>
-          <p:cNvSpPr/>
-          <p:nvPr/>
-        </p:nvSpPr>
-        <p:spPr>
-          <a:xfrm>
-            <a:off x="548640" y="1655064"/>
-            <a:ext cx="8046720" cy="1092771"/>
-          </a:xfrm>
-          <a:prstGeom prst="rect">
-            <a:avLst/>
-          </a:prstGeom>
-          <a:solidFill>
-            <a:srgbClr val="EBEDEB"/>
-          </a:solidFill>
-          <a:ln>
-            <a:noFill/>
-          </a:ln>
-          <a:effectLst/>
-        </p:spPr>
-        <p:style>
-          <a:lnRef idx="1">
-            <a:schemeClr val="accent1"/>
-          </a:lnRef>
-          <a:fillRef idx="3">
-            <a:schemeClr val="accent1"/>
-          </a:fillRef>
-          <a:effectRef idx="0">
-            <a:schemeClr val="accent1"/>
-          </a:effectRef>
-          <a:fontRef idx="minor">
-            <a:schemeClr val="lt1"/>
-          </a:fontRef>
-        </p:style>
-        <p:txBody>
-          <a:bodyPr rtlCol="0" anchor="ctr" wrap="square" lIns="177800" rIns="177800" tIns="101600" bIns="127000">
-            <a:noAutofit/>
-          </a:bodyPr>
-          <a:lstStyle/>
-          <a:p>
-            <a:pPr algn="l">
-              <a:lnSpc>
-                <a:spcPts val="2201"/>
-              </a:lnSpc>
-              <a:spcBef>
-                <a:spcPts val="0"/>
-              </a:spcBef>
-              <a:spcAft>
-                <a:spcPts val="0"/>
-              </a:spcAft>
-              <a:buNone/>
-              <a:defRPr sz="1850" b="0">
-                <a:solidFill>
-                  <a:srgbClr val="303437"/>
-                </a:solidFill>
-                <a:latin typeface="Noto Sans"/>
-              </a:defRPr>
-            </a:pPr>
-            <a:r>
-              <a:rPr sz="1850" b="0" lang="ja-JP" altLang="en-US">
-                <a:solidFill>
-                  <a:srgbClr val="303437"/>
-                </a:solidFill>
-                <a:latin typeface="Noto Sans"/>
-                <a:ea typeface="Noto Sans CJK JP"/>
-                <a:cs typeface="Noto Sans"/>
-              </a:rPr>
-              <a:t>New to Twitter-- any men on here know what the process is to get #verified?</a:t>
-            </a:r>
-          </a:p>
-          <a:p>
-            <a:pPr algn="l">
-              <a:lnSpc>
-                <a:spcPts val="2201"/>
-              </a:lnSpc>
-              <a:spcBef>
-                <a:spcPts val="0"/>
-              </a:spcBef>
-              <a:spcAft>
-                <a:spcPts val="0"/>
-              </a:spcAft>
-              <a:buNone/>
-              <a:defRPr sz="1850" b="0">
-                <a:solidFill>
-                  <a:srgbClr val="303437"/>
-                </a:solidFill>
-                <a:latin typeface="Noto Sans"/>
-              </a:defRPr>
-            </a:pPr>
-            <a:r>
-              <a:rPr sz="1850" b="0" lang="ja-JP" altLang="en-US">
-                <a:solidFill>
-                  <a:srgbClr val="303437"/>
-                </a:solidFill>
-                <a:latin typeface="Noto Sans"/>
-                <a:ea typeface="Noto Sans CJK JP"/>
-                <a:cs typeface="Noto Sans"/>
-              </a:rPr>
-              <a:t>not hate speech</a:t>
-            </a:r>
-          </a:p>
-        </p:txBody>
-      </p:sp>
-      <p:sp>
-        <p:nvSpPr>
-          <p:cNvPr id="6" name="TextBox 5"/>
-          <p:cNvSpPr txBox="1"/>
-          <p:nvPr/>
-        </p:nvSpPr>
-        <p:spPr>
-          <a:xfrm>
-            <a:off x="594360" y="2802699"/>
-            <a:ext cx="7955279" cy="893635"/>
-          </a:xfrm>
-          <a:prstGeom prst="rect">
-            <a:avLst/>
-          </a:prstGeom>
-          <a:noFill/>
-        </p:spPr>
-        <p:txBody>
-          <a:bodyPr wrap="square" lIns="0" rIns="0" tIns="0" bIns="0" anchor="t">
-            <a:noAutofit/>
-          </a:bodyPr>
-          <a:lstStyle/>
-          <a:p>
-            <a:pPr algn="l">
-              <a:lnSpc>
-                <a:spcPts val="2201"/>
-              </a:lnSpc>
-              <a:spcBef>
-                <a:spcPts val="0"/>
-              </a:spcBef>
-              <a:spcAft>
-                <a:spcPts val="0"/>
-              </a:spcAft>
-              <a:buNone/>
-              <a:defRPr sz="1850" b="0">
-                <a:solidFill>
-                  <a:srgbClr val="303437"/>
-                </a:solidFill>
-                <a:latin typeface="Noto Sans"/>
-              </a:defRPr>
-            </a:pPr>
-            <a:r>
-              <a:rPr sz="1850" b="0" lang="ja-JP" altLang="en-US">
-                <a:solidFill>
-                  <a:srgbClr val="303437"/>
-                </a:solidFill>
-                <a:latin typeface="Noto Sans"/>
-                <a:ea typeface="Noto Sans CJK JP"/>
-                <a:cs typeface="Noto Sans"/>
-              </a:rPr>
-              <a:t>入力：Twitterを始めたばかりです。ここにいる男性で、認証済みになる手続きを知っている人はいますか？</a:t>
-            </a:r>
-          </a:p>
-          <a:p>
-            <a:pPr algn="l">
-              <a:lnSpc>
-                <a:spcPts val="2201"/>
-              </a:lnSpc>
-              <a:spcBef>
-                <a:spcPts val="0"/>
-              </a:spcBef>
-              <a:spcAft>
-                <a:spcPts val="0"/>
-              </a:spcAft>
-              <a:buNone/>
-              <a:defRPr sz="1850" b="0">
-                <a:solidFill>
-                  <a:srgbClr val="303437"/>
-                </a:solidFill>
-                <a:latin typeface="Noto Sans"/>
-              </a:defRPr>
-            </a:pPr>
-            <a:r>
-              <a:rPr sz="1850" b="0" lang="ja-JP" altLang="en-US">
-                <a:solidFill>
-                  <a:srgbClr val="303437"/>
-                </a:solidFill>
-                <a:latin typeface="Noto Sans"/>
-                <a:ea typeface="Noto Sans CJK JP"/>
-                <a:cs typeface="Noto Sans"/>
-              </a:rPr>
-              <a:t>配布ラベル：ヘイトスピーチではない</a:t>
-            </a:r>
-          </a:p>
-        </p:txBody>
-      </p:sp>
-      <p:sp>
-        <p:nvSpPr>
-          <p:cNvPr id="7" name="sources"/>
-          <p:cNvSpPr txBox="1"/>
-          <p:nvPr/>
-        </p:nvSpPr>
-        <p:spPr>
-          <a:xfrm>
-            <a:off x="502920" y="4700016"/>
-            <a:ext cx="8183879" cy="530352"/>
-          </a:xfrm>
-          <a:prstGeom prst="rect">
-            <a:avLst/>
-          </a:prstGeom>
-          <a:noFill/>
-        </p:spPr>
-        <p:txBody>
-          <a:bodyPr wrap="square" lIns="0" rIns="0" tIns="0" bIns="0">
-            <a:noAutofit/>
-          </a:bodyPr>
-          <a:lstStyle/>
-          <a:p>
-            <a:pPr algn="l">
-              <a:lnSpc>
-                <a:spcPts val="940"/>
-              </a:lnSpc>
-              <a:spcBef>
-                <a:spcPts val="0"/>
-              </a:spcBef>
-              <a:spcAft>
-                <a:spcPts val="140"/>
-              </a:spcAft>
-              <a:buNone/>
-              <a:defRPr sz="810" b="0">
-                <a:solidFill>
-                  <a:srgbClr val="303437"/>
-                </a:solidFill>
-                <a:latin typeface="Noto Sans"/>
-              </a:defRPr>
-            </a:pPr>
-            <a:r>
-              <a:rPr sz="810" b="0" lang="ja-JP" altLang="en-US">
-                <a:solidFill>
-                  <a:srgbClr val="626669"/>
-                </a:solidFill>
-                <a:latin typeface="Noto Sans"/>
-                <a:ea typeface="Noto Sans CJK JP"/>
-                <a:cs typeface="Noto Sans"/>
-              </a:rPr>
-              <a:t>[1] ought/raft、改訂9ee50172。2026-10-18参照。 tweet_eval_hate / train ID 0。</a:t>
-            </a:r>
-            <a:r>
-              <a:rPr sz="810" b="0" lang="ja-JP" altLang="en-US">
-                <a:solidFill>
-                  <a:srgbClr val="626669"/>
-                </a:solidFill>
-                <a:latin typeface="Noto Sans"/>
-                <a:ea typeface="Noto Sans CJK JP"/>
-                <a:cs typeface="Noto Sans"/>
-              </a:rPr>
-              <a:t>  </a:t>
-            </a:r>
-            <a:r>
-              <a:rPr sz="810" b="0" lang="ja-JP" altLang="en-US">
-                <a:solidFill>
-                  <a:srgbClr val="626669"/>
-                </a:solidFill>
-                <a:latin typeface="Noto Sans"/>
-                <a:ea typeface="Noto Sans CJK JP"/>
-                <a:cs typeface="Noto Sans"/>
-                <a:hlinkClick r:id="rId2"/>
-              </a:rPr>
-              <a:t>https://huggingface.co/datasets/ought/raft</a:t>
-            </a:r>
-          </a:p>
-        </p:txBody>
-      </p:sp>
-    </p:spTree>
-  </p:cSld>
-  <p:clrMapOvr>
-    <a:masterClrMapping/>
-  </p:clrMapOvr>
-</p:sld>
-</file>
-
-<file path=ppt/slides/slide38.xml><?xml version="1.0" encoding="utf-8"?>
 <p:sld xmlns:a="http://schemas.openxmlformats.org/drawingml/2006/main" xmlns:p="http://schemas.openxmlformats.org/presentationml/2006/main" xmlns:r="http://schemas.openxmlformats.org/officeDocument/2006/relationships">
   <p:cSld>
     <p:spTree>
@@ -18498,7 +17676,7 @@
 </p:sld>
 </file>
 
-<file path=ppt/slides/slide39.xml><?xml version="1.0" encoding="utf-8"?>
+<file path=ppt/slides/slide37.xml><?xml version="1.0" encoding="utf-8"?>
 <p:sld xmlns:a="http://schemas.openxmlformats.org/drawingml/2006/main" xmlns:p="http://schemas.openxmlformats.org/presentationml/2006/main" xmlns:r="http://schemas.openxmlformats.org/officeDocument/2006/relationships">
   <p:cSld>
     <p:spTree>
@@ -18934,121 +18112,7 @@
 </p:sld>
 </file>
 
-<file path=ppt/slides/slide4.xml><?xml version="1.0" encoding="utf-8"?>
-<p:sld xmlns:a="http://schemas.openxmlformats.org/drawingml/2006/main" xmlns:p="http://schemas.openxmlformats.org/presentationml/2006/main" xmlns:r="http://schemas.openxmlformats.org/officeDocument/2006/relationships">
-  <p:cSld>
-    <p:spTree>
-      <p:nvGrpSpPr>
-        <p:cNvPr id="1" name=""/>
-        <p:cNvGrpSpPr/>
-        <p:nvPr/>
-      </p:nvGrpSpPr>
-      <p:grpSpPr/>
-      <p:sp>
-        <p:nvSpPr>
-          <p:cNvPr id="2" name="Title 1"/>
-          <p:cNvSpPr>
-            <a:spLocks noGrp="1"/>
-          </p:cNvSpPr>
-          <p:nvPr>
-            <p:ph type="title"/>
-          </p:nvPr>
-        </p:nvSpPr>
-        <p:spPr>
-          <a:xfrm>
-            <a:off x="548640" y="2506875"/>
-            <a:ext cx="8046720" cy="585216"/>
-          </a:xfrm>
-        </p:spPr>
-        <p:txBody>
-          <a:bodyPr wrap="square" lIns="0" rIns="0" tIns="0" bIns="0" anchor="ctr">
-            <a:noAutofit/>
-          </a:bodyPr>
-          <a:lstStyle/>
-          <a:p>
-            <a:pPr algn="ctr">
-              <a:lnSpc>
-                <a:spcPct val="110000"/>
-              </a:lnSpc>
-              <a:buNone/>
-              <a:defRPr sz="3600" b="0">
-                <a:solidFill>
-                  <a:srgbClr val="303437"/>
-                </a:solidFill>
-                <a:latin typeface="Noto Sans"/>
-              </a:defRPr>
-            </a:pPr>
-            <a:r>
-              <a:rPr sz="3600" b="1" lang="ja-JP" altLang="en-US">
-                <a:solidFill>
-                  <a:srgbClr val="303437"/>
-                </a:solidFill>
-                <a:latin typeface="Noto Sans"/>
-                <a:ea typeface="Noto Sans CJK JP"/>
-                <a:cs typeface="Noto Sans"/>
-              </a:rPr>
-              <a:t>課題と実際のデータ</a:t>
-            </a:r>
-          </a:p>
-        </p:txBody>
-      </p:sp>
-      <p:sp>
-        <p:nvSpPr>
-          <p:cNvPr id="3" name="Title 2"/>
-          <p:cNvSpPr>
-            <a:spLocks noGrp="1"/>
-          </p:cNvSpPr>
-          <p:nvPr>
-            <p:ph type="title" idx="2"/>
-          </p:nvPr>
-        </p:nvSpPr>
-        <p:spPr>
-          <a:xfrm>
-            <a:off x="75895" y="0"/>
-            <a:ext cx="8115300" cy="480060"/>
-          </a:xfrm>
-        </p:spPr>
-        <p:txBody>
-          <a:bodyPr wrap="square" lIns="0" rIns="0" tIns="0" bIns="0" anchor="ctr">
-            <a:noAutofit/>
-          </a:bodyPr>
-          <a:lstStyle/>
-          <a:p>
-            <a:pPr algn="l">
-              <a:lnSpc>
-                <a:spcPct val="110000"/>
-              </a:lnSpc>
-              <a:buNone/>
-              <a:defRPr sz="1400" b="0">
-                <a:solidFill>
-                  <a:srgbClr val="303437"/>
-                </a:solidFill>
-                <a:latin typeface="Noto Sans"/>
-              </a:defRPr>
-            </a:pPr>
-            <a:r>
-              <a:rPr sz="1400" b="1" lang="ja-JP" altLang="en-US">
-                <a:solidFill>
-                  <a:srgbClr val="FFFEF8"/>
-                </a:solidFill>
-                <a:latin typeface="Noto Sans"/>
-                <a:ea typeface="Noto Sans CJK JP"/>
-                <a:cs typeface="Noto Sans"/>
-              </a:rPr>
-              <a:t>1. 課題と実際のデータ</a:t>
-            </a:r>
-          </a:p>
-        </p:txBody>
-      </p:sp>
-    </p:spTree>
-  </p:cSld>
-  <p:clrMapOvr>
-    <a:masterClrMapping/>
-  </p:clrMapOvr>
-</p:sld>
-</file>
-
-<file path=ppt/slides/slide40.xml><?xml version="1.0" encoding="utf-8"?>
+<file path=ppt/slides/slide38.xml><?xml version="1.0" encoding="utf-8"?>
 <p:sld xmlns:a="http://schemas.openxmlformats.org/drawingml/2006/main" xmlns:p="http://schemas.openxmlformats.org/presentationml/2006/main" xmlns:r="http://schemas.openxmlformats.org/officeDocument/2006/relationships">
   <p:cSld>
     <p:spTree>
@@ -19483,7 +18547,7 @@
 </p:sld>
 </file>
 
-<file path=ppt/slides/slide41.xml><?xml version="1.0" encoding="utf-8"?>
+<file path=ppt/slides/slide39.xml><?xml version="1.0" encoding="utf-8"?>
 <p:sld xmlns:a="http://schemas.openxmlformats.org/drawingml/2006/main" xmlns:p="http://schemas.openxmlformats.org/presentationml/2006/main" xmlns:r="http://schemas.openxmlformats.org/officeDocument/2006/relationships">
   <p:cSld>
     <p:spTree>
@@ -19597,7 +18661,121 @@
 </p:sld>
 </file>
 
-<file path=ppt/slides/slide42.xml><?xml version="1.0" encoding="utf-8"?>
+<file path=ppt/slides/slide4.xml><?xml version="1.0" encoding="utf-8"?>
+<p:sld xmlns:a="http://schemas.openxmlformats.org/drawingml/2006/main" xmlns:p="http://schemas.openxmlformats.org/presentationml/2006/main" xmlns:r="http://schemas.openxmlformats.org/officeDocument/2006/relationships">
+  <p:cSld>
+    <p:spTree>
+      <p:nvGrpSpPr>
+        <p:cNvPr id="1" name=""/>
+        <p:cNvGrpSpPr/>
+        <p:nvPr/>
+      </p:nvGrpSpPr>
+      <p:grpSpPr/>
+      <p:sp>
+        <p:nvSpPr>
+          <p:cNvPr id="2" name="Title 1"/>
+          <p:cNvSpPr>
+            <a:spLocks noGrp="1"/>
+          </p:cNvSpPr>
+          <p:nvPr>
+            <p:ph type="title"/>
+          </p:nvPr>
+        </p:nvSpPr>
+        <p:spPr>
+          <a:xfrm>
+            <a:off x="548640" y="2506875"/>
+            <a:ext cx="8046720" cy="585216"/>
+          </a:xfrm>
+        </p:spPr>
+        <p:txBody>
+          <a:bodyPr wrap="square" lIns="0" rIns="0" tIns="0" bIns="0" anchor="ctr">
+            <a:noAutofit/>
+          </a:bodyPr>
+          <a:lstStyle/>
+          <a:p>
+            <a:pPr algn="ctr">
+              <a:lnSpc>
+                <a:spcPct val="110000"/>
+              </a:lnSpc>
+              <a:buNone/>
+              <a:defRPr sz="3600" b="0">
+                <a:solidFill>
+                  <a:srgbClr val="303437"/>
+                </a:solidFill>
+                <a:latin typeface="Noto Sans"/>
+              </a:defRPr>
+            </a:pPr>
+            <a:r>
+              <a:rPr sz="3600" b="1" lang="ja-JP" altLang="en-US">
+                <a:solidFill>
+                  <a:srgbClr val="303437"/>
+                </a:solidFill>
+                <a:latin typeface="Noto Sans"/>
+                <a:ea typeface="Noto Sans CJK JP"/>
+                <a:cs typeface="Noto Sans"/>
+              </a:rPr>
+              <a:t>課題と実際のデータ</a:t>
+            </a:r>
+          </a:p>
+        </p:txBody>
+      </p:sp>
+      <p:sp>
+        <p:nvSpPr>
+          <p:cNvPr id="3" name="Title 2"/>
+          <p:cNvSpPr>
+            <a:spLocks noGrp="1"/>
+          </p:cNvSpPr>
+          <p:nvPr>
+            <p:ph type="title" idx="2"/>
+          </p:nvPr>
+        </p:nvSpPr>
+        <p:spPr>
+          <a:xfrm>
+            <a:off x="75895" y="0"/>
+            <a:ext cx="8115300" cy="480060"/>
+          </a:xfrm>
+        </p:spPr>
+        <p:txBody>
+          <a:bodyPr wrap="square" lIns="0" rIns="0" tIns="0" bIns="0" anchor="ctr">
+            <a:noAutofit/>
+          </a:bodyPr>
+          <a:lstStyle/>
+          <a:p>
+            <a:pPr algn="l">
+              <a:lnSpc>
+                <a:spcPct val="110000"/>
+              </a:lnSpc>
+              <a:buNone/>
+              <a:defRPr sz="1400" b="0">
+                <a:solidFill>
+                  <a:srgbClr val="303437"/>
+                </a:solidFill>
+                <a:latin typeface="Noto Sans"/>
+              </a:defRPr>
+            </a:pPr>
+            <a:r>
+              <a:rPr sz="1400" b="1" lang="ja-JP" altLang="en-US">
+                <a:solidFill>
+                  <a:srgbClr val="FFFEF8"/>
+                </a:solidFill>
+                <a:latin typeface="Noto Sans"/>
+                <a:ea typeface="Noto Sans CJK JP"/>
+                <a:cs typeface="Noto Sans"/>
+              </a:rPr>
+              <a:t>1. 課題と実際のデータ</a:t>
+            </a:r>
+          </a:p>
+        </p:txBody>
+      </p:sp>
+    </p:spTree>
+  </p:cSld>
+  <p:clrMapOvr>
+    <a:masterClrMapping/>
+  </p:clrMapOvr>
+</p:sld>
+</file>
+
+<file path=ppt/slides/slide40.xml><?xml version="1.0" encoding="utf-8"?>
 <p:sld xmlns:a="http://schemas.openxmlformats.org/drawingml/2006/main" xmlns:p="http://schemas.openxmlformats.org/presentationml/2006/main" xmlns:r="http://schemas.openxmlformats.org/officeDocument/2006/relationships">
   <p:cSld>
     <p:spTree>
@@ -20913,7 +20091,7 @@
 </p:sld>
 </file>
 
-<file path=ppt/slides/slide43.xml><?xml version="1.0" encoding="utf-8"?>
+<file path=ppt/slides/slide41.xml><?xml version="1.0" encoding="utf-8"?>
 <p:sld xmlns:a="http://schemas.openxmlformats.org/drawingml/2006/main" xmlns:p="http://schemas.openxmlformats.org/presentationml/2006/main" xmlns:r="http://schemas.openxmlformats.org/officeDocument/2006/relationships">
   <p:cSld>
     <p:spTree>
@@ -22077,7 +21255,7 @@
 </p:sld>
 </file>
 
-<file path=ppt/slides/slide44.xml><?xml version="1.0" encoding="utf-8"?>
+<file path=ppt/slides/slide42.xml><?xml version="1.0" encoding="utf-8"?>
 <p:sld xmlns:a="http://schemas.openxmlformats.org/drawingml/2006/main" xmlns:p="http://schemas.openxmlformats.org/presentationml/2006/main" xmlns:r="http://schemas.openxmlformats.org/officeDocument/2006/relationships">
   <p:cSld>
     <p:spTree>
@@ -22179,6 +21357,542 @@
                 <a:cs typeface="Noto Sans"/>
               </a:rPr>
               <a:t>Appendix: 3. 研究と参考文献</a:t>
+            </a:r>
+          </a:p>
+        </p:txBody>
+      </p:sp>
+    </p:spTree>
+  </p:cSld>
+  <p:clrMapOvr>
+    <a:masterClrMapping/>
+  </p:clrMapOvr>
+</p:sld>
+</file>
+
+<file path=ppt/slides/slide43.xml><?xml version="1.0" encoding="utf-8"?>
+<p:sld xmlns:a="http://schemas.openxmlformats.org/drawingml/2006/main" xmlns:p="http://schemas.openxmlformats.org/presentationml/2006/main" xmlns:r="http://schemas.openxmlformats.org/officeDocument/2006/relationships">
+  <p:cSld>
+    <p:spTree>
+      <p:nvGrpSpPr>
+        <p:cNvPr id="1" name=""/>
+        <p:cNvGrpSpPr/>
+        <p:nvPr/>
+      </p:nvGrpSpPr>
+      <p:grpSpPr/>
+      <p:sp>
+        <p:nvSpPr>
+          <p:cNvPr id="2" name="Title 1"/>
+          <p:cNvSpPr>
+            <a:spLocks noGrp="1"/>
+          </p:cNvSpPr>
+          <p:nvPr>
+            <p:ph type="title"/>
+          </p:nvPr>
+        </p:nvSpPr>
+        <p:spPr>
+          <a:xfrm>
+            <a:off x="468172" y="650138"/>
+            <a:ext cx="8206740" cy="616305"/>
+          </a:xfrm>
+        </p:spPr>
+        <p:txBody>
+          <a:bodyPr wrap="square" lIns="0" rIns="0" tIns="0" bIns="0">
+            <a:noAutofit/>
+          </a:bodyPr>
+          <a:lstStyle/>
+          <a:p>
+            <a:pPr algn="l">
+              <a:lnSpc>
+                <a:spcPct val="110000"/>
+              </a:lnSpc>
+              <a:buNone/>
+              <a:defRPr sz="2800" b="0">
+                <a:solidFill>
+                  <a:srgbClr val="303437"/>
+                </a:solidFill>
+                <a:latin typeface="Noto Sans"/>
+              </a:defRPr>
+            </a:pPr>
+            <a:r>
+              <a:rPr sz="2800" b="1" lang="ja-JP" altLang="en-US">
+                <a:solidFill>
+                  <a:srgbClr val="303437"/>
+                </a:solidFill>
+                <a:latin typeface="Noto Sans"/>
+                <a:ea typeface="Noto Sans CJK JP"/>
+                <a:cs typeface="Noto Sans"/>
+              </a:rPr>
+              <a:t>研究者と発表の位置付け</a:t>
+            </a:r>
+          </a:p>
+        </p:txBody>
+      </p:sp>
+      <p:sp>
+        <p:nvSpPr>
+          <p:cNvPr id="3" name="Text Placeholder 2"/>
+          <p:cNvSpPr>
+            <a:spLocks noGrp="1"/>
+          </p:cNvSpPr>
+          <p:nvPr>
+            <p:ph type="body" idx="1"/>
+          </p:nvPr>
+        </p:nvSpPr>
+        <p:spPr>
+          <a:xfrm>
+            <a:off x="594360" y="1463040"/>
+            <a:ext cx="7955279" cy="3044952"/>
+          </a:xfrm>
+        </p:spPr>
+        <p:txBody>
+          <a:bodyPr wrap="square" tIns="91440" bIns="91440">
+            <a:noAutofit/>
+          </a:bodyPr>
+          <a:lstStyle/>
+          <a:p>
+            <a:pPr marL="457200" indent="-355600">
+              <a:lnSpc>
+                <a:spcPts val="2618"/>
+              </a:lnSpc>
+              <a:spcAft>
+                <a:spcPts val="700"/>
+              </a:spcAft>
+              <a:buSzPct val="60455"/>
+              <a:buFont typeface="Noto Sans CJK JP"/>
+              <a:buChar char="●"/>
+              <a:defRPr sz="2200" b="0">
+                <a:solidFill>
+                  <a:srgbClr val="303437"/>
+                </a:solidFill>
+                <a:latin typeface="Noto Sans"/>
+              </a:defRPr>
+            </a:pPr>
+            <a:r>
+              <a:rPr sz="2200" b="0" lang="ja-JP" altLang="en-US">
+                <a:solidFill>
+                  <a:srgbClr val="303437"/>
+                </a:solidFill>
+                <a:latin typeface="Noto Sans"/>
+                <a:ea typeface="Noto Sans CJK JP"/>
+                <a:cs typeface="Noto Sans"/>
+              </a:rPr>
+              <a:t>Neel AlexとEli Liflandは等しく貢献したと記載されている。最終著者はAndreas Stuhlmüller。</a:t>
+            </a:r>
+          </a:p>
+          <a:p>
+            <a:pPr marL="457200" indent="-355600">
+              <a:lnSpc>
+                <a:spcPts val="2618"/>
+              </a:lnSpc>
+              <a:spcAft>
+                <a:spcPts val="0"/>
+              </a:spcAft>
+              <a:buSzPct val="60455"/>
+              <a:buFont typeface="Noto Sans CJK JP"/>
+              <a:buChar char="●"/>
+              <a:defRPr sz="2200" b="0">
+                <a:solidFill>
+                  <a:srgbClr val="303437"/>
+                </a:solidFill>
+                <a:latin typeface="Noto Sans"/>
+              </a:defRPr>
+            </a:pPr>
+            <a:r>
+              <a:rPr sz="2200" b="0" lang="ja-JP" altLang="en-US">
+                <a:solidFill>
+                  <a:srgbClr val="303437"/>
+                </a:solidFill>
+                <a:latin typeface="Noto Sans"/>
+                <a:ea typeface="Noto Sans CJK JP"/>
+                <a:cs typeface="Noto Sans"/>
+              </a:rPr>
+              <a:t>Ought、Hugging Faceなどの共同研究で、NeurIPS Datasets and Benchmarks 2021で発表した。</a:t>
+            </a:r>
+          </a:p>
+        </p:txBody>
+      </p:sp>
+      <p:sp>
+        <p:nvSpPr>
+          <p:cNvPr id="4" name="Title 3"/>
+          <p:cNvSpPr>
+            <a:spLocks noGrp="1"/>
+          </p:cNvSpPr>
+          <p:nvPr>
+            <p:ph type="title" idx="2"/>
+          </p:nvPr>
+        </p:nvSpPr>
+        <p:spPr>
+          <a:xfrm>
+            <a:off x="75895" y="0"/>
+            <a:ext cx="8115300" cy="480060"/>
+          </a:xfrm>
+        </p:spPr>
+        <p:txBody>
+          <a:bodyPr wrap="square" lIns="0" rIns="0" tIns="0" bIns="0" anchor="ctr">
+            <a:noAutofit/>
+          </a:bodyPr>
+          <a:lstStyle/>
+          <a:p>
+            <a:pPr algn="l">
+              <a:lnSpc>
+                <a:spcPct val="110000"/>
+              </a:lnSpc>
+              <a:buNone/>
+              <a:defRPr sz="1400" b="0">
+                <a:solidFill>
+                  <a:srgbClr val="303437"/>
+                </a:solidFill>
+                <a:latin typeface="Noto Sans"/>
+              </a:defRPr>
+            </a:pPr>
+            <a:r>
+              <a:rPr sz="1400" b="1" lang="ja-JP" altLang="en-US">
+                <a:solidFill>
+                  <a:srgbClr val="FFFEF8"/>
+                </a:solidFill>
+                <a:latin typeface="Noto Sans"/>
+                <a:ea typeface="Noto Sans CJK JP"/>
+                <a:cs typeface="Noto Sans"/>
+              </a:rPr>
+              <a:t>Appendix: 3. 研究と参考文献</a:t>
+            </a:r>
+          </a:p>
+        </p:txBody>
+      </p:sp>
+      <p:sp>
+        <p:nvSpPr>
+          <p:cNvPr id="5" name="sources"/>
+          <p:cNvSpPr txBox="1"/>
+          <p:nvPr/>
+        </p:nvSpPr>
+        <p:spPr>
+          <a:xfrm>
+            <a:off x="502920" y="4700016"/>
+            <a:ext cx="8183879" cy="530352"/>
+          </a:xfrm>
+          <a:prstGeom prst="rect">
+            <a:avLst/>
+          </a:prstGeom>
+          <a:noFill/>
+        </p:spPr>
+        <p:txBody>
+          <a:bodyPr wrap="square" lIns="0" rIns="0" tIns="0" bIns="0">
+            <a:noAutofit/>
+          </a:bodyPr>
+          <a:lstStyle/>
+          <a:p>
+            <a:pPr algn="l">
+              <a:lnSpc>
+                <a:spcPts val="940"/>
+              </a:lnSpc>
+              <a:spcBef>
+                <a:spcPts val="0"/>
+              </a:spcBef>
+              <a:spcAft>
+                <a:spcPts val="140"/>
+              </a:spcAft>
+              <a:buNone/>
+              <a:defRPr sz="810" b="0">
+                <a:solidFill>
+                  <a:srgbClr val="303437"/>
+                </a:solidFill>
+                <a:latin typeface="Noto Sans"/>
+              </a:defRPr>
+            </a:pPr>
+            <a:r>
+              <a:rPr sz="810" b="0" lang="ja-JP" altLang="en-US">
+                <a:solidFill>
+                  <a:srgbClr val="626669"/>
+                </a:solidFill>
+                <a:latin typeface="Noto Sans"/>
+                <a:ea typeface="Noto Sans CJK JP"/>
+                <a:cs typeface="Noto Sans"/>
+              </a:rPr>
+              <a:t>[1] Neel Alex et al. (2021). RAFT: A Real-World Few-Shot Text Classification Benchmark. NeurIPS Datasets and Benchmarks 2021.</a:t>
+            </a:r>
+            <a:r>
+              <a:rPr sz="810" b="0" lang="ja-JP" altLang="en-US">
+                <a:solidFill>
+                  <a:srgbClr val="626669"/>
+                </a:solidFill>
+                <a:latin typeface="Noto Sans"/>
+                <a:ea typeface="Noto Sans CJK JP"/>
+                <a:cs typeface="Noto Sans"/>
+              </a:rPr>
+              <a:t>  </a:t>
+            </a:r>
+            <a:r>
+              <a:rPr sz="810" b="0" lang="ja-JP" altLang="en-US">
+                <a:solidFill>
+                  <a:srgbClr val="626669"/>
+                </a:solidFill>
+                <a:latin typeface="Noto Sans"/>
+                <a:ea typeface="Noto Sans CJK JP"/>
+                <a:cs typeface="Noto Sans"/>
+                <a:hlinkClick r:id="rId2"/>
+              </a:rPr>
+              <a:t>https://arxiv.org/abs/2109.14076</a:t>
+            </a:r>
+          </a:p>
+        </p:txBody>
+      </p:sp>
+    </p:spTree>
+  </p:cSld>
+  <p:clrMapOvr>
+    <a:masterClrMapping/>
+  </p:clrMapOvr>
+</p:sld>
+</file>
+
+<file path=ppt/slides/slide44.xml><?xml version="1.0" encoding="utf-8"?>
+<p:sld xmlns:a="http://schemas.openxmlformats.org/drawingml/2006/main" xmlns:p="http://schemas.openxmlformats.org/presentationml/2006/main" xmlns:r="http://schemas.openxmlformats.org/officeDocument/2006/relationships">
+  <p:cSld>
+    <p:spTree>
+      <p:nvGrpSpPr>
+        <p:cNvPr id="1" name=""/>
+        <p:cNvGrpSpPr/>
+        <p:nvPr/>
+      </p:nvGrpSpPr>
+      <p:grpSpPr/>
+      <p:sp>
+        <p:nvSpPr>
+          <p:cNvPr id="2" name="Title 1"/>
+          <p:cNvSpPr>
+            <a:spLocks noGrp="1"/>
+          </p:cNvSpPr>
+          <p:nvPr>
+            <p:ph type="title"/>
+          </p:nvPr>
+        </p:nvSpPr>
+        <p:spPr>
+          <a:xfrm>
+            <a:off x="468172" y="650138"/>
+            <a:ext cx="8206740" cy="616305"/>
+          </a:xfrm>
+        </p:spPr>
+        <p:txBody>
+          <a:bodyPr wrap="square" lIns="0" rIns="0" tIns="0" bIns="0">
+            <a:noAutofit/>
+          </a:bodyPr>
+          <a:lstStyle/>
+          <a:p>
+            <a:pPr algn="l">
+              <a:lnSpc>
+                <a:spcPct val="110000"/>
+              </a:lnSpc>
+              <a:buNone/>
+              <a:defRPr sz="2800" b="0">
+                <a:solidFill>
+                  <a:srgbClr val="303437"/>
+                </a:solidFill>
+                <a:latin typeface="Noto Sans"/>
+              </a:defRPr>
+            </a:pPr>
+            <a:r>
+              <a:rPr sz="2800" b="1" lang="ja-JP" altLang="en-US">
+                <a:solidFill>
+                  <a:srgbClr val="303437"/>
+                </a:solidFill>
+                <a:latin typeface="Noto Sans"/>
+                <a:ea typeface="Noto Sans CJK JP"/>
+                <a:cs typeface="Noto Sans"/>
+              </a:rPr>
+              <a:t>参考文献</a:t>
+            </a:r>
+          </a:p>
+        </p:txBody>
+      </p:sp>
+      <p:sp>
+        <p:nvSpPr>
+          <p:cNvPr id="3" name="Title 2"/>
+          <p:cNvSpPr>
+            <a:spLocks noGrp="1"/>
+          </p:cNvSpPr>
+          <p:nvPr>
+            <p:ph type="title" idx="2"/>
+          </p:nvPr>
+        </p:nvSpPr>
+        <p:spPr>
+          <a:xfrm>
+            <a:off x="75895" y="0"/>
+            <a:ext cx="8115300" cy="480060"/>
+          </a:xfrm>
+        </p:spPr>
+        <p:txBody>
+          <a:bodyPr wrap="square" lIns="0" rIns="0" tIns="0" bIns="0" anchor="ctr">
+            <a:noAutofit/>
+          </a:bodyPr>
+          <a:lstStyle/>
+          <a:p>
+            <a:pPr algn="l">
+              <a:lnSpc>
+                <a:spcPct val="110000"/>
+              </a:lnSpc>
+              <a:buNone/>
+              <a:defRPr sz="1400" b="0">
+                <a:solidFill>
+                  <a:srgbClr val="303437"/>
+                </a:solidFill>
+                <a:latin typeface="Noto Sans"/>
+              </a:defRPr>
+            </a:pPr>
+            <a:r>
+              <a:rPr sz="1400" b="1" lang="ja-JP" altLang="en-US">
+                <a:solidFill>
+                  <a:srgbClr val="FFFEF8"/>
+                </a:solidFill>
+                <a:latin typeface="Noto Sans"/>
+                <a:ea typeface="Noto Sans CJK JP"/>
+                <a:cs typeface="Noto Sans"/>
+              </a:rPr>
+              <a:t>Appendix: 3. 研究と参考文献</a:t>
+            </a:r>
+          </a:p>
+        </p:txBody>
+      </p:sp>
+      <p:sp>
+        <p:nvSpPr>
+          <p:cNvPr id="4" name="文献 1: RAFT: A Real-World Few-Shot Text Classification Benchmark"/>
+          <p:cNvSpPr txBox="1"/>
+          <p:nvPr/>
+        </p:nvSpPr>
+        <p:spPr>
+          <a:xfrm>
+            <a:off x="548640" y="1463040"/>
+            <a:ext cx="8046720" cy="3200400"/>
+          </a:xfrm>
+          <a:prstGeom prst="rect">
+            <a:avLst/>
+          </a:prstGeom>
+          <a:noFill/>
+        </p:spPr>
+        <p:txBody>
+          <a:bodyPr wrap="square" lIns="0" rIns="0" tIns="0" bIns="0">
+            <a:noAutofit/>
+          </a:bodyPr>
+          <a:lstStyle/>
+          <a:p>
+            <a:pPr algn="l">
+              <a:lnSpc>
+                <a:spcPct val="114000"/>
+              </a:lnSpc>
+              <a:spcBef>
+                <a:spcPts val="0"/>
+              </a:spcBef>
+              <a:spcAft>
+                <a:spcPts val="400"/>
+              </a:spcAft>
+              <a:buNone/>
+              <a:defRPr sz="2000" b="0">
+                <a:solidFill>
+                  <a:srgbClr val="303437"/>
+                </a:solidFill>
+                <a:latin typeface="Noto Sans"/>
+              </a:defRPr>
+            </a:pPr>
+            <a:r>
+              <a:rPr sz="2000" b="1" lang="ja-JP" altLang="en-US">
+                <a:solidFill>
+                  <a:srgbClr val="303437"/>
+                </a:solidFill>
+                <a:latin typeface="Noto Sans"/>
+                <a:ea typeface="Noto Sans CJK JP"/>
+                <a:cs typeface="Noto Sans"/>
+              </a:rPr>
+              <a:t>RAFT: A Real-World Few-Shot Text Classification Benchmark</a:t>
+            </a:r>
+          </a:p>
+          <a:p>
+            <a:pPr algn="l">
+              <a:lnSpc>
+                <a:spcPct val="114000"/>
+              </a:lnSpc>
+              <a:spcBef>
+                <a:spcPts val="0"/>
+              </a:spcBef>
+              <a:spcAft>
+                <a:spcPts val="500"/>
+              </a:spcAft>
+              <a:buNone/>
+              <a:defRPr sz="1350" b="0">
+                <a:solidFill>
+                  <a:srgbClr val="303437"/>
+                </a:solidFill>
+                <a:latin typeface="Noto Sans"/>
+              </a:defRPr>
+            </a:pPr>
+            <a:r>
+              <a:rPr sz="1350" b="0" lang="ja-JP" altLang="en-US">
+                <a:solidFill>
+                  <a:srgbClr val="626669"/>
+                </a:solidFill>
+                <a:latin typeface="Noto Sans"/>
+                <a:ea typeface="Noto Sans CJK JP"/>
+                <a:cs typeface="Noto Sans"/>
+              </a:rPr>
+              <a:t>Neel Alex, Eli Lifland, Lewis Tunstall, Abhishek Thakur, Pegah Maham, C. Jess Riedel, Emmie Hine, Carolyn Ashurst, Paul Sedille, Alexis Carlier, Michael Noetel, Andreas Stuhlmüller / NeurIPS Datasets and Benchmarks 2021</a:t>
+            </a:r>
+          </a:p>
+          <a:p>
+            <a:pPr algn="l">
+              <a:lnSpc>
+                <a:spcPct val="114000"/>
+              </a:lnSpc>
+              <a:spcBef>
+                <a:spcPts val="0"/>
+              </a:spcBef>
+              <a:spcAft>
+                <a:spcPts val="400"/>
+              </a:spcAft>
+              <a:buNone/>
+              <a:defRPr sz="1850" b="0">
+                <a:solidFill>
+                  <a:srgbClr val="303437"/>
+                </a:solidFill>
+                <a:latin typeface="Noto Sans"/>
+              </a:defRPr>
+            </a:pPr>
+            <a:r>
+              <a:rPr sz="1850" b="0" lang="ja-JP" altLang="en-US">
+                <a:solidFill>
+                  <a:srgbClr val="303437"/>
+                </a:solidFill>
+                <a:latin typeface="Noto Sans"/>
+                <a:ea typeface="Noto Sans CJK JP"/>
+                <a:cs typeface="Noto Sans"/>
+              </a:rPr>
+              <a:t>RAFTの目的、作成方法、評価をまとめた研究。</a:t>
+            </a:r>
+          </a:p>
+          <a:p>
+            <a:pPr algn="l">
+              <a:lnSpc>
+                <a:spcPct val="114000"/>
+              </a:lnSpc>
+              <a:spcBef>
+                <a:spcPts val="0"/>
+              </a:spcBef>
+              <a:spcAft>
+                <a:spcPts val="0"/>
+              </a:spcAft>
+              <a:buNone/>
+              <a:defRPr sz="1150" b="0">
+                <a:solidFill>
+                  <a:srgbClr val="303437"/>
+                </a:solidFill>
+                <a:latin typeface="Noto Sans"/>
+              </a:defRPr>
+            </a:pPr>
+            <a:r>
+              <a:rPr sz="1150" b="0" lang="ja-JP" altLang="en-US">
+                <a:solidFill>
+                  <a:srgbClr val="626669"/>
+                </a:solidFill>
+                <a:latin typeface="Noto Sans"/>
+                <a:ea typeface="Noto Sans CJK JP"/>
+                <a:cs typeface="Noto Sans"/>
+                <a:hlinkClick r:id="rId2"/>
+              </a:rPr>
+              <a:t>https://arxiv.org/abs/2109.14076</a:t>
             </a:r>
           </a:p>
         </p:txBody>
@@ -22244,280 +21958,6 @@
                 <a:ea typeface="Noto Sans CJK JP"/>
                 <a:cs typeface="Noto Sans"/>
               </a:rPr>
-              <a:t>研究者と発表の位置付け</a:t>
-            </a:r>
-          </a:p>
-        </p:txBody>
-      </p:sp>
-      <p:sp>
-        <p:nvSpPr>
-          <p:cNvPr id="3" name="Text Placeholder 2"/>
-          <p:cNvSpPr>
-            <a:spLocks noGrp="1"/>
-          </p:cNvSpPr>
-          <p:nvPr>
-            <p:ph type="body" idx="1"/>
-          </p:nvPr>
-        </p:nvSpPr>
-        <p:spPr>
-          <a:xfrm>
-            <a:off x="594360" y="1463040"/>
-            <a:ext cx="7955279" cy="3044952"/>
-          </a:xfrm>
-        </p:spPr>
-        <p:txBody>
-          <a:bodyPr wrap="square" tIns="91440" bIns="91440">
-            <a:noAutofit/>
-          </a:bodyPr>
-          <a:lstStyle/>
-          <a:p>
-            <a:pPr marL="457200" indent="-355600">
-              <a:lnSpc>
-                <a:spcPts val="2618"/>
-              </a:lnSpc>
-              <a:spcAft>
-                <a:spcPts val="700"/>
-              </a:spcAft>
-              <a:buSzPct val="60455"/>
-              <a:buFont typeface="Noto Sans CJK JP"/>
-              <a:buChar char="●"/>
-              <a:defRPr sz="2200" b="0">
-                <a:solidFill>
-                  <a:srgbClr val="303437"/>
-                </a:solidFill>
-                <a:latin typeface="Noto Sans"/>
-              </a:defRPr>
-            </a:pPr>
-            <a:r>
-              <a:rPr sz="2200" b="0" lang="ja-JP" altLang="en-US">
-                <a:solidFill>
-                  <a:srgbClr val="303437"/>
-                </a:solidFill>
-                <a:latin typeface="Noto Sans"/>
-                <a:ea typeface="Noto Sans CJK JP"/>
-                <a:cs typeface="Noto Sans"/>
-              </a:rPr>
-              <a:t>Neel AlexとEli Liflandは等しく貢献したと記載されている。最終著者はAndreas Stuhlmüller。</a:t>
-            </a:r>
-          </a:p>
-          <a:p>
-            <a:pPr marL="457200" indent="-355600">
-              <a:lnSpc>
-                <a:spcPts val="2618"/>
-              </a:lnSpc>
-              <a:spcAft>
-                <a:spcPts val="0"/>
-              </a:spcAft>
-              <a:buSzPct val="60455"/>
-              <a:buFont typeface="Noto Sans CJK JP"/>
-              <a:buChar char="●"/>
-              <a:defRPr sz="2200" b="0">
-                <a:solidFill>
-                  <a:srgbClr val="303437"/>
-                </a:solidFill>
-                <a:latin typeface="Noto Sans"/>
-              </a:defRPr>
-            </a:pPr>
-            <a:r>
-              <a:rPr sz="2200" b="0" lang="ja-JP" altLang="en-US">
-                <a:solidFill>
-                  <a:srgbClr val="303437"/>
-                </a:solidFill>
-                <a:latin typeface="Noto Sans"/>
-                <a:ea typeface="Noto Sans CJK JP"/>
-                <a:cs typeface="Noto Sans"/>
-              </a:rPr>
-              <a:t>Ought、Hugging Faceなどの共同研究で、NeurIPS Datasets and Benchmarks 2021で発表した。</a:t>
-            </a:r>
-          </a:p>
-        </p:txBody>
-      </p:sp>
-      <p:sp>
-        <p:nvSpPr>
-          <p:cNvPr id="4" name="Title 3"/>
-          <p:cNvSpPr>
-            <a:spLocks noGrp="1"/>
-          </p:cNvSpPr>
-          <p:nvPr>
-            <p:ph type="title" idx="2"/>
-          </p:nvPr>
-        </p:nvSpPr>
-        <p:spPr>
-          <a:xfrm>
-            <a:off x="75895" y="0"/>
-            <a:ext cx="8115300" cy="480060"/>
-          </a:xfrm>
-        </p:spPr>
-        <p:txBody>
-          <a:bodyPr wrap="square" lIns="0" rIns="0" tIns="0" bIns="0" anchor="ctr">
-            <a:noAutofit/>
-          </a:bodyPr>
-          <a:lstStyle/>
-          <a:p>
-            <a:pPr algn="l">
-              <a:lnSpc>
-                <a:spcPct val="110000"/>
-              </a:lnSpc>
-              <a:buNone/>
-              <a:defRPr sz="1400" b="0">
-                <a:solidFill>
-                  <a:srgbClr val="303437"/>
-                </a:solidFill>
-                <a:latin typeface="Noto Sans"/>
-              </a:defRPr>
-            </a:pPr>
-            <a:r>
-              <a:rPr sz="1400" b="1" lang="ja-JP" altLang="en-US">
-                <a:solidFill>
-                  <a:srgbClr val="FFFEF8"/>
-                </a:solidFill>
-                <a:latin typeface="Noto Sans"/>
-                <a:ea typeface="Noto Sans CJK JP"/>
-                <a:cs typeface="Noto Sans"/>
-              </a:rPr>
-              <a:t>Appendix: 3. 研究と参考文献</a:t>
-            </a:r>
-          </a:p>
-        </p:txBody>
-      </p:sp>
-      <p:sp>
-        <p:nvSpPr>
-          <p:cNvPr id="5" name="sources"/>
-          <p:cNvSpPr txBox="1"/>
-          <p:nvPr/>
-        </p:nvSpPr>
-        <p:spPr>
-          <a:xfrm>
-            <a:off x="502920" y="4700016"/>
-            <a:ext cx="8183879" cy="530352"/>
-          </a:xfrm>
-          <a:prstGeom prst="rect">
-            <a:avLst/>
-          </a:prstGeom>
-          <a:noFill/>
-        </p:spPr>
-        <p:txBody>
-          <a:bodyPr wrap="square" lIns="0" rIns="0" tIns="0" bIns="0">
-            <a:noAutofit/>
-          </a:bodyPr>
-          <a:lstStyle/>
-          <a:p>
-            <a:pPr algn="l">
-              <a:lnSpc>
-                <a:spcPts val="940"/>
-              </a:lnSpc>
-              <a:spcBef>
-                <a:spcPts val="0"/>
-              </a:spcBef>
-              <a:spcAft>
-                <a:spcPts val="140"/>
-              </a:spcAft>
-              <a:buNone/>
-              <a:defRPr sz="810" b="0">
-                <a:solidFill>
-                  <a:srgbClr val="303437"/>
-                </a:solidFill>
-                <a:latin typeface="Noto Sans"/>
-              </a:defRPr>
-            </a:pPr>
-            <a:r>
-              <a:rPr sz="810" b="0" lang="ja-JP" altLang="en-US">
-                <a:solidFill>
-                  <a:srgbClr val="626669"/>
-                </a:solidFill>
-                <a:latin typeface="Noto Sans"/>
-                <a:ea typeface="Noto Sans CJK JP"/>
-                <a:cs typeface="Noto Sans"/>
-              </a:rPr>
-              <a:t>[1] Neel Alex et al. (2021). RAFT: A Real-World Few-Shot Text Classification Benchmark. NeurIPS Datasets and Benchmarks 2021.</a:t>
-            </a:r>
-            <a:r>
-              <a:rPr sz="810" b="0" lang="ja-JP" altLang="en-US">
-                <a:solidFill>
-                  <a:srgbClr val="626669"/>
-                </a:solidFill>
-                <a:latin typeface="Noto Sans"/>
-                <a:ea typeface="Noto Sans CJK JP"/>
-                <a:cs typeface="Noto Sans"/>
-              </a:rPr>
-              <a:t>  </a:t>
-            </a:r>
-            <a:r>
-              <a:rPr sz="810" b="0" lang="ja-JP" altLang="en-US">
-                <a:solidFill>
-                  <a:srgbClr val="626669"/>
-                </a:solidFill>
-                <a:latin typeface="Noto Sans"/>
-                <a:ea typeface="Noto Sans CJK JP"/>
-                <a:cs typeface="Noto Sans"/>
-                <a:hlinkClick r:id="rId2"/>
-              </a:rPr>
-              <a:t>https://arxiv.org/abs/2109.14076</a:t>
-            </a:r>
-          </a:p>
-        </p:txBody>
-      </p:sp>
-    </p:spTree>
-  </p:cSld>
-  <p:clrMapOvr>
-    <a:masterClrMapping/>
-  </p:clrMapOvr>
-</p:sld>
-</file>
-
-<file path=ppt/slides/slide46.xml><?xml version="1.0" encoding="utf-8"?>
-<p:sld xmlns:a="http://schemas.openxmlformats.org/drawingml/2006/main" xmlns:p="http://schemas.openxmlformats.org/presentationml/2006/main" xmlns:r="http://schemas.openxmlformats.org/officeDocument/2006/relationships">
-  <p:cSld>
-    <p:spTree>
-      <p:nvGrpSpPr>
-        <p:cNvPr id="1" name=""/>
-        <p:cNvGrpSpPr/>
-        <p:nvPr/>
-      </p:nvGrpSpPr>
-      <p:grpSpPr/>
-      <p:sp>
-        <p:nvSpPr>
-          <p:cNvPr id="2" name="Title 1"/>
-          <p:cNvSpPr>
-            <a:spLocks noGrp="1"/>
-          </p:cNvSpPr>
-          <p:nvPr>
-            <p:ph type="title"/>
-          </p:nvPr>
-        </p:nvSpPr>
-        <p:spPr>
-          <a:xfrm>
-            <a:off x="468172" y="650138"/>
-            <a:ext cx="8206740" cy="616305"/>
-          </a:xfrm>
-        </p:spPr>
-        <p:txBody>
-          <a:bodyPr wrap="square" lIns="0" rIns="0" tIns="0" bIns="0">
-            <a:noAutofit/>
-          </a:bodyPr>
-          <a:lstStyle/>
-          <a:p>
-            <a:pPr algn="l">
-              <a:lnSpc>
-                <a:spcPct val="110000"/>
-              </a:lnSpc>
-              <a:buNone/>
-              <a:defRPr sz="2800" b="0">
-                <a:solidFill>
-                  <a:srgbClr val="303437"/>
-                </a:solidFill>
-                <a:latin typeface="Noto Sans"/>
-              </a:defRPr>
-            </a:pPr>
-            <a:r>
-              <a:rPr sz="2800" b="1" lang="ja-JP" altLang="en-US">
-                <a:solidFill>
-                  <a:srgbClr val="303437"/>
-                </a:solidFill>
-                <a:latin typeface="Noto Sans"/>
-                <a:ea typeface="Noto Sans CJK JP"/>
-                <a:cs typeface="Noto Sans"/>
-              </a:rPr>
               <a:t>参考文献</a:t>
             </a:r>
           </a:p>
@@ -22573,268 +22013,6 @@
       </p:sp>
       <p:sp>
         <p:nvSpPr>
-          <p:cNvPr id="4" name="文献 1: RAFT: A Real-World Few-Shot Text Classification Benchmark"/>
-          <p:cNvSpPr txBox="1"/>
-          <p:nvPr/>
-        </p:nvSpPr>
-        <p:spPr>
-          <a:xfrm>
-            <a:off x="548640" y="1463040"/>
-            <a:ext cx="8046720" cy="3200400"/>
-          </a:xfrm>
-          <a:prstGeom prst="rect">
-            <a:avLst/>
-          </a:prstGeom>
-          <a:noFill/>
-        </p:spPr>
-        <p:txBody>
-          <a:bodyPr wrap="square" lIns="0" rIns="0" tIns="0" bIns="0">
-            <a:noAutofit/>
-          </a:bodyPr>
-          <a:lstStyle/>
-          <a:p>
-            <a:pPr algn="l">
-              <a:lnSpc>
-                <a:spcPct val="114000"/>
-              </a:lnSpc>
-              <a:spcBef>
-                <a:spcPts val="0"/>
-              </a:spcBef>
-              <a:spcAft>
-                <a:spcPts val="400"/>
-              </a:spcAft>
-              <a:buNone/>
-              <a:defRPr sz="2000" b="0">
-                <a:solidFill>
-                  <a:srgbClr val="303437"/>
-                </a:solidFill>
-                <a:latin typeface="Noto Sans"/>
-              </a:defRPr>
-            </a:pPr>
-            <a:r>
-              <a:rPr sz="2000" b="1" lang="ja-JP" altLang="en-US">
-                <a:solidFill>
-                  <a:srgbClr val="303437"/>
-                </a:solidFill>
-                <a:latin typeface="Noto Sans"/>
-                <a:ea typeface="Noto Sans CJK JP"/>
-                <a:cs typeface="Noto Sans"/>
-              </a:rPr>
-              <a:t>RAFT: A Real-World Few-Shot Text Classification Benchmark</a:t>
-            </a:r>
-          </a:p>
-          <a:p>
-            <a:pPr algn="l">
-              <a:lnSpc>
-                <a:spcPct val="114000"/>
-              </a:lnSpc>
-              <a:spcBef>
-                <a:spcPts val="0"/>
-              </a:spcBef>
-              <a:spcAft>
-                <a:spcPts val="500"/>
-              </a:spcAft>
-              <a:buNone/>
-              <a:defRPr sz="1350" b="0">
-                <a:solidFill>
-                  <a:srgbClr val="303437"/>
-                </a:solidFill>
-                <a:latin typeface="Noto Sans"/>
-              </a:defRPr>
-            </a:pPr>
-            <a:r>
-              <a:rPr sz="1350" b="0" lang="ja-JP" altLang="en-US">
-                <a:solidFill>
-                  <a:srgbClr val="626669"/>
-                </a:solidFill>
-                <a:latin typeface="Noto Sans"/>
-                <a:ea typeface="Noto Sans CJK JP"/>
-                <a:cs typeface="Noto Sans"/>
-              </a:rPr>
-              <a:t>Neel Alex, Eli Lifland, Lewis Tunstall, Abhishek Thakur, Pegah Maham, C. Jess Riedel, Emmie Hine, Carolyn Ashurst, Paul Sedille, Alexis Carlier, Michael Noetel, Andreas Stuhlmüller / NeurIPS Datasets and Benchmarks 2021</a:t>
-            </a:r>
-          </a:p>
-          <a:p>
-            <a:pPr algn="l">
-              <a:lnSpc>
-                <a:spcPct val="114000"/>
-              </a:lnSpc>
-              <a:spcBef>
-                <a:spcPts val="0"/>
-              </a:spcBef>
-              <a:spcAft>
-                <a:spcPts val="400"/>
-              </a:spcAft>
-              <a:buNone/>
-              <a:defRPr sz="1850" b="0">
-                <a:solidFill>
-                  <a:srgbClr val="303437"/>
-                </a:solidFill>
-                <a:latin typeface="Noto Sans"/>
-              </a:defRPr>
-            </a:pPr>
-            <a:r>
-              <a:rPr sz="1850" b="0" lang="ja-JP" altLang="en-US">
-                <a:solidFill>
-                  <a:srgbClr val="303437"/>
-                </a:solidFill>
-                <a:latin typeface="Noto Sans"/>
-                <a:ea typeface="Noto Sans CJK JP"/>
-                <a:cs typeface="Noto Sans"/>
-              </a:rPr>
-              <a:t>RAFTの目的、作成方法、評価をまとめた研究。</a:t>
-            </a:r>
-          </a:p>
-          <a:p>
-            <a:pPr algn="l">
-              <a:lnSpc>
-                <a:spcPct val="114000"/>
-              </a:lnSpc>
-              <a:spcBef>
-                <a:spcPts val="0"/>
-              </a:spcBef>
-              <a:spcAft>
-                <a:spcPts val="0"/>
-              </a:spcAft>
-              <a:buNone/>
-              <a:defRPr sz="1150" b="0">
-                <a:solidFill>
-                  <a:srgbClr val="303437"/>
-                </a:solidFill>
-                <a:latin typeface="Noto Sans"/>
-              </a:defRPr>
-            </a:pPr>
-            <a:r>
-              <a:rPr sz="1150" b="0" lang="ja-JP" altLang="en-US">
-                <a:solidFill>
-                  <a:srgbClr val="626669"/>
-                </a:solidFill>
-                <a:latin typeface="Noto Sans"/>
-                <a:ea typeface="Noto Sans CJK JP"/>
-                <a:cs typeface="Noto Sans"/>
-                <a:hlinkClick r:id="rId2"/>
-              </a:rPr>
-              <a:t>https://arxiv.org/abs/2109.14076</a:t>
-            </a:r>
-          </a:p>
-        </p:txBody>
-      </p:sp>
-    </p:spTree>
-  </p:cSld>
-  <p:clrMapOvr>
-    <a:masterClrMapping/>
-  </p:clrMapOvr>
-</p:sld>
-</file>
-
-<file path=ppt/slides/slide47.xml><?xml version="1.0" encoding="utf-8"?>
-<p:sld xmlns:a="http://schemas.openxmlformats.org/drawingml/2006/main" xmlns:p="http://schemas.openxmlformats.org/presentationml/2006/main" xmlns:r="http://schemas.openxmlformats.org/officeDocument/2006/relationships">
-  <p:cSld>
-    <p:spTree>
-      <p:nvGrpSpPr>
-        <p:cNvPr id="1" name=""/>
-        <p:cNvGrpSpPr/>
-        <p:nvPr/>
-      </p:nvGrpSpPr>
-      <p:grpSpPr/>
-      <p:sp>
-        <p:nvSpPr>
-          <p:cNvPr id="2" name="Title 1"/>
-          <p:cNvSpPr>
-            <a:spLocks noGrp="1"/>
-          </p:cNvSpPr>
-          <p:nvPr>
-            <p:ph type="title"/>
-          </p:nvPr>
-        </p:nvSpPr>
-        <p:spPr>
-          <a:xfrm>
-            <a:off x="468172" y="650138"/>
-            <a:ext cx="8206740" cy="616305"/>
-          </a:xfrm>
-        </p:spPr>
-        <p:txBody>
-          <a:bodyPr wrap="square" lIns="0" rIns="0" tIns="0" bIns="0">
-            <a:noAutofit/>
-          </a:bodyPr>
-          <a:lstStyle/>
-          <a:p>
-            <a:pPr algn="l">
-              <a:lnSpc>
-                <a:spcPct val="110000"/>
-              </a:lnSpc>
-              <a:buNone/>
-              <a:defRPr sz="2800" b="0">
-                <a:solidFill>
-                  <a:srgbClr val="303437"/>
-                </a:solidFill>
-                <a:latin typeface="Noto Sans"/>
-              </a:defRPr>
-            </a:pPr>
-            <a:r>
-              <a:rPr sz="2800" b="1" lang="ja-JP" altLang="en-US">
-                <a:solidFill>
-                  <a:srgbClr val="303437"/>
-                </a:solidFill>
-                <a:latin typeface="Noto Sans"/>
-                <a:ea typeface="Noto Sans CJK JP"/>
-                <a:cs typeface="Noto Sans"/>
-              </a:rPr>
-              <a:t>参考文献</a:t>
-            </a:r>
-          </a:p>
-        </p:txBody>
-      </p:sp>
-      <p:sp>
-        <p:nvSpPr>
-          <p:cNvPr id="3" name="Title 2"/>
-          <p:cNvSpPr>
-            <a:spLocks noGrp="1"/>
-          </p:cNvSpPr>
-          <p:nvPr>
-            <p:ph type="title" idx="2"/>
-          </p:nvPr>
-        </p:nvSpPr>
-        <p:spPr>
-          <a:xfrm>
-            <a:off x="75895" y="0"/>
-            <a:ext cx="8115300" cy="480060"/>
-          </a:xfrm>
-        </p:spPr>
-        <p:txBody>
-          <a:bodyPr wrap="square" lIns="0" rIns="0" tIns="0" bIns="0" anchor="ctr">
-            <a:noAutofit/>
-          </a:bodyPr>
-          <a:lstStyle/>
-          <a:p>
-            <a:pPr algn="l">
-              <a:lnSpc>
-                <a:spcPct val="110000"/>
-              </a:lnSpc>
-              <a:buNone/>
-              <a:defRPr sz="1400" b="0">
-                <a:solidFill>
-                  <a:srgbClr val="303437"/>
-                </a:solidFill>
-                <a:latin typeface="Noto Sans"/>
-              </a:defRPr>
-            </a:pPr>
-            <a:r>
-              <a:rPr sz="1400" b="1" lang="ja-JP" altLang="en-US">
-                <a:solidFill>
-                  <a:srgbClr val="FFFEF8"/>
-                </a:solidFill>
-                <a:latin typeface="Noto Sans"/>
-                <a:ea typeface="Noto Sans CJK JP"/>
-                <a:cs typeface="Noto Sans"/>
-              </a:rPr>
-              <a:t>Appendix: 3. 研究と参考文献</a:t>
-            </a:r>
-          </a:p>
-        </p:txBody>
-      </p:sp>
-      <p:sp>
-        <p:nvSpPr>
           <p:cNvPr id="4" name="文献 1: Holistic Evaluation of Language Models"/>
           <p:cNvSpPr txBox="1"/>
           <p:nvPr/>
@@ -22989,7 +22167,7 @@
 </p:sld>
 </file>
 
-<file path=ppt/slides/slide48.xml><?xml version="1.0" encoding="utf-8"?>
+<file path=ppt/slides/slide46.xml><?xml version="1.0" encoding="utf-8"?>
 <p:sld xmlns:a="http://schemas.openxmlformats.org/drawingml/2006/main" xmlns:p="http://schemas.openxmlformats.org/presentationml/2006/main" xmlns:r="http://schemas.openxmlformats.org/officeDocument/2006/relationships">
   <p:cSld>
     <p:spTree>
